--- a/취업역량강화/[강의자료] 취업역량강화_PART2_01 기업 탐색_활동지.pptx
+++ b/취업역량강화/[강의자료] 취업역량강화_PART2_01 기업 탐색_활동지.pptx
@@ -17,34 +17,26 @@
   <p:notesSz cx="6858000" cy="9144000"/>
   <p:embeddedFontLst>
     <p:embeddedFont>
-      <p:font typeface="맑은 고딕" panose="020B0503020000020004" pitchFamily="34" charset="-127"/>
+      <p:font typeface="나눔바른고딕" panose="020B0600000101010101" charset="-127"/>
       <p:regular r:id="rId7"/>
       <p:bold r:id="rId8"/>
     </p:embeddedFont>
     <p:embeddedFont>
-      <p:font typeface="나눔고딕" panose="020B0604020202020204" charset="-127"/>
+      <p:font typeface="Consolas" panose="020B0609020204030204" pitchFamily="49" charset="0"/>
       <p:regular r:id="rId9"/>
       <p:bold r:id="rId10"/>
+      <p:italic r:id="rId11"/>
+      <p:boldItalic r:id="rId12"/>
     </p:embeddedFont>
     <p:embeddedFont>
-      <p:font typeface="나눔바른고딕 Light" panose="020B0603020101020101" pitchFamily="34" charset="-127"/>
-      <p:regular r:id="rId11"/>
-    </p:embeddedFont>
-    <p:embeddedFont>
-      <p:font typeface="G마켓 산스 TTF Bold" panose="02000000000000000000" pitchFamily="2" charset="-128"/>
-      <p:bold r:id="rId12"/>
-    </p:embeddedFont>
-    <p:embeddedFont>
-      <p:font typeface="나눔바른고딕" panose="020B0603020101020101" pitchFamily="34" charset="-127"/>
+      <p:font typeface="나눔고딕" pitchFamily="2" charset="-127"/>
       <p:regular r:id="rId13"/>
       <p:bold r:id="rId14"/>
     </p:embeddedFont>
     <p:embeddedFont>
-      <p:font typeface="Consolas" panose="020B0609020204030204" pitchFamily="49" charset="0"/>
+      <p:font typeface="맑은 고딕" panose="020B0503020000020004" pitchFamily="50" charset="-127"/>
       <p:regular r:id="rId15"/>
       <p:bold r:id="rId16"/>
-      <p:italic r:id="rId17"/>
-      <p:boldItalic r:id="rId18"/>
     </p:embeddedFont>
   </p:embeddedFontLst>
   <p:defaultTextStyle>
@@ -255,7 +247,7 @@
             <a:fld id="{ED4E9270-3294-4B1F-9756-8D47FA5BA4C0}" type="datetimeFigureOut">
               <a:rPr lang="ko-KR" altLang="en-US" smtClean="0"/>
               <a:pPr/>
-              <a:t>2026-06-08</a:t>
+              <a:t>2026-06-14</a:t>
             </a:fld>
             <a:endParaRPr lang="ko-KR" altLang="en-US" dirty="0"/>
           </a:p>
@@ -3709,7 +3701,7 @@
           <a:lstStyle/>
           <a:p>
             <a:r>
-              <a:rPr lang="ko-KR" altLang="en-US" b="1" dirty="0" smtClean="0">
+              <a:rPr lang="ko-KR" altLang="en-US" b="1" dirty="0">
                 <a:solidFill>
                   <a:schemeClr val="tx1"/>
                 </a:solidFill>
@@ -3719,16 +3711,6 @@
               <a:t>실습 </a:t>
             </a:r>
             <a:r>
-              <a:rPr lang="en-US" altLang="ko-KR" b="1" dirty="0" smtClean="0">
-                <a:solidFill>
-                  <a:schemeClr val="tx1"/>
-                </a:solidFill>
-                <a:latin typeface="맑은 고딕" panose="020B0503020000020004" pitchFamily="34" charset="-127"/>
-                <a:ea typeface="맑은 고딕" panose="020B0503020000020004" pitchFamily="34" charset="-127"/>
-              </a:rPr>
-              <a:t>1</a:t>
-            </a:r>
-            <a:r>
               <a:rPr lang="en-US" altLang="ko-KR" b="1" dirty="0">
                 <a:solidFill>
                   <a:schemeClr val="tx1"/>
@@ -3736,7 +3718,7 @@
                 <a:latin typeface="맑은 고딕" panose="020B0503020000020004" pitchFamily="34" charset="-127"/>
                 <a:ea typeface="맑은 고딕" panose="020B0503020000020004" pitchFamily="34" charset="-127"/>
               </a:rPr>
-              <a:t>.</a:t>
+              <a:t>1.</a:t>
             </a:r>
             <a:r>
               <a:rPr lang="en-US" altLang="ko-KR" b="1" dirty="0">
@@ -3787,32 +3769,25 @@
           <a:lstStyle/>
           <a:p>
             <a:r>
-              <a:rPr lang="ko-KR" altLang="en-US" sz="2400" b="1" spc="-150" dirty="0" smtClean="0">
+              <a:rPr lang="ko-KR" altLang="en-US" sz="2400" b="1" spc="-150" dirty="0">
                 <a:latin typeface="맑은 고딕" panose="020B0503020000020004" pitchFamily="34" charset="-127"/>
                 <a:ea typeface="맑은 고딕" panose="020B0503020000020004" pitchFamily="34" charset="-127"/>
               </a:rPr>
               <a:t>활동</a:t>
             </a:r>
             <a:r>
-              <a:rPr lang="en-US" altLang="ko-KR" sz="2400" b="1" spc="-150" dirty="0" smtClean="0">
+              <a:rPr lang="en-US" altLang="ko-KR" sz="2400" b="1" spc="-150" dirty="0">
                 <a:latin typeface="맑은 고딕" panose="020B0503020000020004" pitchFamily="34" charset="-127"/>
                 <a:ea typeface="맑은 고딕" panose="020B0503020000020004" pitchFamily="34" charset="-127"/>
               </a:rPr>
               <a:t>: </a:t>
             </a:r>
             <a:r>
-              <a:rPr lang="ko-KR" altLang="en-US" sz="2400" spc="-150" dirty="0" smtClean="0">
-                <a:latin typeface="맑은 고딕" panose="020B0503020000020004" pitchFamily="34" charset="-127"/>
-                <a:ea typeface="맑은 고딕" panose="020B0503020000020004" pitchFamily="34" charset="-127"/>
-              </a:rPr>
-              <a:t>사람인 </a:t>
-            </a:r>
-            <a:r>
               <a:rPr lang="ko-KR" altLang="en-US" sz="2400" spc="-150" dirty="0">
                 <a:latin typeface="맑은 고딕" panose="020B0503020000020004" pitchFamily="34" charset="-127"/>
                 <a:ea typeface="맑은 고딕" panose="020B0503020000020004" pitchFamily="34" charset="-127"/>
               </a:rPr>
-              <a:t>또는 </a:t>
+              <a:t>사람인 또는 </a:t>
             </a:r>
             <a:r>
               <a:rPr lang="ko-KR" altLang="en-US" sz="2400" spc="-150" dirty="0" err="1">
@@ -3928,13 +3903,18 @@
             <p:ph type="title"/>
           </p:nvPr>
         </p:nvSpPr>
-        <p:spPr/>
+        <p:spPr>
+          <a:xfrm>
+            <a:off x="558800" y="366185"/>
+            <a:ext cx="10515600" cy="91015"/>
+          </a:xfrm>
+        </p:spPr>
         <p:txBody>
           <a:bodyPr/>
           <a:lstStyle/>
           <a:p>
             <a:r>
-              <a:rPr lang="ko-KR" altLang="en-US" b="1" dirty="0" smtClean="0">
+              <a:rPr lang="ko-KR" altLang="en-US" b="1" dirty="0">
                 <a:solidFill>
                   <a:schemeClr val="tx1"/>
                 </a:solidFill>
@@ -3944,16 +3924,6 @@
               <a:t>실습 </a:t>
             </a:r>
             <a:r>
-              <a:rPr lang="en-US" altLang="ko-KR" b="1" dirty="0" smtClean="0">
-                <a:solidFill>
-                  <a:schemeClr val="tx1"/>
-                </a:solidFill>
-                <a:latin typeface="맑은 고딕" panose="020B0503020000020004" pitchFamily="34" charset="-127"/>
-                <a:ea typeface="맑은 고딕" panose="020B0503020000020004" pitchFamily="34" charset="-127"/>
-              </a:rPr>
-              <a:t>1</a:t>
-            </a:r>
-            <a:r>
               <a:rPr lang="en-US" altLang="ko-KR" b="1" dirty="0">
                 <a:solidFill>
                   <a:schemeClr val="tx1"/>
@@ -3961,7 +3931,7 @@
                 <a:latin typeface="맑은 고딕" panose="020B0503020000020004" pitchFamily="34" charset="-127"/>
                 <a:ea typeface="맑은 고딕" panose="020B0503020000020004" pitchFamily="34" charset="-127"/>
               </a:rPr>
-              <a:t>. </a:t>
+              <a:t>1. </a:t>
             </a:r>
             <a:r>
               <a:rPr lang="ko-KR" altLang="en-US" b="1" dirty="0">
@@ -3997,7 +3967,12 @@
             <p:ph idx="1"/>
           </p:nvPr>
         </p:nvSpPr>
-        <p:spPr/>
+        <p:spPr>
+          <a:xfrm>
+            <a:off x="495300" y="609600"/>
+            <a:ext cx="10642600" cy="4982632"/>
+          </a:xfrm>
+        </p:spPr>
         <p:txBody>
           <a:bodyPr>
             <a:normAutofit/>
@@ -4005,63 +3980,56 @@
           <a:lstStyle/>
           <a:p>
             <a:r>
-              <a:rPr lang="ko-KR" altLang="en-US" sz="2400" b="1" spc="-150" dirty="0" smtClean="0">
+              <a:rPr lang="ko-KR" altLang="en-US" sz="1600" b="1" spc="-150" dirty="0">
                 <a:latin typeface="맑은 고딕" panose="020B0503020000020004" pitchFamily="34" charset="-127"/>
                 <a:ea typeface="맑은 고딕" panose="020B0503020000020004" pitchFamily="34" charset="-127"/>
               </a:rPr>
               <a:t>결과물</a:t>
             </a:r>
             <a:r>
-              <a:rPr lang="en-US" altLang="ko-KR" sz="2400" b="1" spc="-150" dirty="0" smtClean="0">
+              <a:rPr lang="en-US" altLang="ko-KR" sz="1600" b="1" spc="-150" dirty="0">
                 <a:latin typeface="맑은 고딕" panose="020B0503020000020004" pitchFamily="34" charset="-127"/>
                 <a:ea typeface="맑은 고딕" panose="020B0503020000020004" pitchFamily="34" charset="-127"/>
               </a:rPr>
               <a:t>: </a:t>
             </a:r>
             <a:r>
-              <a:rPr lang="ko-KR" altLang="en-US" sz="2400" spc="-150" dirty="0" smtClean="0">
+              <a:rPr lang="ko-KR" altLang="en-US" sz="1600" spc="-150" dirty="0">
                 <a:latin typeface="맑은 고딕" panose="020B0503020000020004" pitchFamily="34" charset="-127"/>
                 <a:ea typeface="맑은 고딕" panose="020B0503020000020004" pitchFamily="34" charset="-127"/>
               </a:rPr>
-              <a:t>관심 </a:t>
-            </a:r>
-            <a:r>
-              <a:rPr lang="ko-KR" altLang="en-US" sz="2400" spc="-150" dirty="0">
-                <a:latin typeface="맑은 고딕" panose="020B0503020000020004" pitchFamily="34" charset="-127"/>
-                <a:ea typeface="맑은 고딕" panose="020B0503020000020004" pitchFamily="34" charset="-127"/>
-              </a:rPr>
-              <a:t>공고 </a:t>
-            </a:r>
-            <a:r>
-              <a:rPr lang="en-US" altLang="ko-KR" sz="2400" spc="-150" dirty="0">
+              <a:t>관심 공고 </a:t>
+            </a:r>
+            <a:r>
+              <a:rPr lang="en-US" altLang="ko-KR" sz="1600" spc="-150" dirty="0">
                 <a:latin typeface="맑은 고딕" panose="020B0503020000020004" pitchFamily="34" charset="-127"/>
                 <a:ea typeface="맑은 고딕" panose="020B0503020000020004" pitchFamily="34" charset="-127"/>
               </a:rPr>
               <a:t>3</a:t>
             </a:r>
             <a:r>
-              <a:rPr lang="ko-KR" altLang="en-US" sz="2400" spc="-150" dirty="0">
+              <a:rPr lang="ko-KR" altLang="en-US" sz="1600" spc="-150" dirty="0">
                 <a:latin typeface="맑은 고딕" panose="020B0503020000020004" pitchFamily="34" charset="-127"/>
                 <a:ea typeface="맑은 고딕" panose="020B0503020000020004" pitchFamily="34" charset="-127"/>
               </a:rPr>
               <a:t>개를 저장하고</a:t>
             </a:r>
             <a:r>
-              <a:rPr lang="en-US" altLang="ko-KR" sz="2400" spc="-150" dirty="0">
+              <a:rPr lang="en-US" altLang="ko-KR" sz="1600" spc="-150" dirty="0">
                 <a:latin typeface="맑은 고딕" panose="020B0503020000020004" pitchFamily="34" charset="-127"/>
                 <a:ea typeface="맑은 고딕" panose="020B0503020000020004" pitchFamily="34" charset="-127"/>
               </a:rPr>
               <a:t>, </a:t>
             </a:r>
             <a:r>
-              <a:rPr lang="ko-KR" altLang="en-US" sz="2400" spc="-150" dirty="0">
+              <a:rPr lang="ko-KR" altLang="en-US" sz="1600" spc="-150" dirty="0">
                 <a:latin typeface="맑은 고딕" panose="020B0503020000020004" pitchFamily="34" charset="-127"/>
                 <a:ea typeface="맑은 고딕" panose="020B0503020000020004" pitchFamily="34" charset="-127"/>
               </a:rPr>
               <a:t>표로 정리한다</a:t>
             </a:r>
             <a:r>
-              <a:rPr lang="en-US" altLang="ko-KR" sz="2400" spc="-150" dirty="0">
+              <a:rPr lang="en-US" altLang="ko-KR" sz="1600" spc="-150" dirty="0">
                 <a:latin typeface="맑은 고딕" panose="020B0503020000020004" pitchFamily="34" charset="-127"/>
                 <a:ea typeface="맑은 고딕" panose="020B0503020000020004" pitchFamily="34" charset="-127"/>
               </a:rPr>
@@ -4079,14 +4047,14 @@
           <p:nvPr>
             <p:extLst>
               <p:ext uri="{D42A27DB-BD31-4B8C-83A1-F6EECF244321}">
-                <p14:modId xmlns:p14="http://schemas.microsoft.com/office/powerpoint/2010/main" val="1931630134"/>
+                <p14:modId xmlns:p14="http://schemas.microsoft.com/office/powerpoint/2010/main" val="210329643"/>
               </p:ext>
             </p:extLst>
           </p:nvPr>
         </p:nvGraphicFramePr>
         <p:xfrm>
-          <a:off x="990600" y="2286000"/>
-          <a:ext cx="10515600" cy="2495550"/>
+          <a:off x="601279" y="1066800"/>
+          <a:ext cx="10515600" cy="4926330"/>
         </p:xfrm>
         <a:graphic>
           <a:graphicData uri="http://schemas.openxmlformats.org/drawingml/2006/table">
@@ -4206,28 +4174,28 @@
                     <a:lstStyle/>
                     <a:p>
                       <a:r>
-                        <a:rPr lang="ko-KR" altLang="en-US" sz="1800" dirty="0" err="1" smtClean="0">
+                        <a:rPr lang="ko-KR" altLang="en-US" sz="1800" dirty="0" err="1">
                           <a:latin typeface="맑은 고딕" panose="020B0503020000020004" pitchFamily="34" charset="-127"/>
                           <a:ea typeface="맑은 고딕" panose="020B0503020000020004" pitchFamily="34" charset="-127"/>
                         </a:rPr>
                         <a:t>공고명</a:t>
                       </a:r>
                       <a:r>
-                        <a:rPr lang="en-US" altLang="ko-KR" sz="1800" dirty="0" smtClean="0">
+                        <a:rPr lang="en-US" altLang="ko-KR" sz="1800" dirty="0">
                           <a:latin typeface="맑은 고딕" panose="020B0503020000020004" pitchFamily="34" charset="-127"/>
                           <a:ea typeface="맑은 고딕" panose="020B0503020000020004" pitchFamily="34" charset="-127"/>
                         </a:rPr>
                         <a:t>(</a:t>
                       </a:r>
                       <a:r>
-                        <a:rPr lang="ko-KR" altLang="en-US" sz="1800" dirty="0" err="1" smtClean="0">
+                        <a:rPr lang="ko-KR" altLang="en-US" sz="1800" dirty="0" err="1">
                           <a:latin typeface="맑은 고딕" panose="020B0503020000020004" pitchFamily="34" charset="-127"/>
                           <a:ea typeface="맑은 고딕" panose="020B0503020000020004" pitchFamily="34" charset="-127"/>
                         </a:rPr>
                         <a:t>링크첨부</a:t>
                       </a:r>
                       <a:r>
-                        <a:rPr lang="en-US" altLang="ko-KR" sz="1800" dirty="0" smtClean="0">
+                        <a:rPr lang="en-US" altLang="ko-KR" sz="1800" dirty="0">
                           <a:latin typeface="맑은 고딕" panose="020B0503020000020004" pitchFamily="34" charset="-127"/>
                           <a:ea typeface="맑은 고딕" panose="020B0503020000020004" pitchFamily="34" charset="-127"/>
                         </a:rPr>
@@ -4525,6 +4493,34 @@
                     <a:bodyPr/>
                     <a:lstStyle/>
                     <a:p>
+                      <a:r>
+                        <a:rPr lang="en-US" altLang="ko-KR" sz="1800" dirty="0">
+                          <a:latin typeface="맑은 고딕" panose="020B0503020000020004" pitchFamily="34" charset="-127"/>
+                          <a:ea typeface="맑은 고딕" panose="020B0503020000020004" pitchFamily="34" charset="-127"/>
+                        </a:rPr>
+                        <a:t>(</a:t>
+                      </a:r>
+                      <a:r>
+                        <a:rPr lang="ko-KR" altLang="en-US" sz="1800" dirty="0" err="1">
+                          <a:latin typeface="맑은 고딕" panose="020B0503020000020004" pitchFamily="34" charset="-127"/>
+                          <a:ea typeface="맑은 고딕" panose="020B0503020000020004" pitchFamily="34" charset="-127"/>
+                        </a:rPr>
+                        <a:t>즈</a:t>
+                      </a:r>
+                      <a:r>
+                        <a:rPr lang="en-US" altLang="ko-KR" sz="1800" dirty="0">
+                          <a:latin typeface="맑은 고딕" panose="020B0503020000020004" pitchFamily="34" charset="-127"/>
+                          <a:ea typeface="맑은 고딕" panose="020B0503020000020004" pitchFamily="34" charset="-127"/>
+                        </a:rPr>
+                        <a:t>)</a:t>
+                      </a:r>
+                      <a:r>
+                        <a:rPr lang="ko-KR" altLang="en-US" sz="1800" dirty="0" err="1">
+                          <a:latin typeface="맑은 고딕" panose="020B0503020000020004" pitchFamily="34" charset="-127"/>
+                          <a:ea typeface="맑은 고딕" panose="020B0503020000020004" pitchFamily="34" charset="-127"/>
+                        </a:rPr>
+                        <a:t>쎄믹스</a:t>
+                      </a:r>
                       <a:endParaRPr lang="ko-KR" altLang="en-US" sz="1800" dirty="0">
                         <a:latin typeface="맑은 고딕" panose="020B0503020000020004" pitchFamily="34" charset="-127"/>
                         <a:ea typeface="맑은 고딕" panose="020B0503020000020004" pitchFamily="34" charset="-127"/>
@@ -4587,6 +4583,41 @@
                     <a:bodyPr/>
                     <a:lstStyle/>
                     <a:p>
+                      <a:r>
+                        <a:rPr lang="ko-KR" altLang="en-US" sz="1800" dirty="0" err="1">
+                          <a:latin typeface="맑은 고딕" panose="020B0503020000020004" pitchFamily="34" charset="-127"/>
+                          <a:ea typeface="맑은 고딕" panose="020B0503020000020004" pitchFamily="34" charset="-127"/>
+                          <a:hlinkClick r:id="rId2"/>
+                        </a:rPr>
+                        <a:t>쎄믹스</a:t>
+                      </a:r>
+                      <a:endParaRPr lang="en-US" altLang="ko-KR" sz="1800" dirty="0">
+                        <a:latin typeface="맑은 고딕" panose="020B0503020000020004" pitchFamily="34" charset="-127"/>
+                        <a:ea typeface="맑은 고딕" panose="020B0503020000020004" pitchFamily="34" charset="-127"/>
+                      </a:endParaRPr>
+                    </a:p>
+                    <a:p>
+                      <a:r>
+                        <a:rPr lang="en-US" altLang="ko-KR" sz="1800" dirty="0">
+                          <a:latin typeface="맑은 고딕" panose="020B0503020000020004" pitchFamily="34" charset="-127"/>
+                          <a:ea typeface="맑은 고딕" panose="020B0503020000020004" pitchFamily="34" charset="-127"/>
+                        </a:rPr>
+                        <a:t>(</a:t>
+                      </a:r>
+                      <a:r>
+                        <a:rPr lang="ko-KR" altLang="en-US" sz="1800" dirty="0">
+                          <a:latin typeface="맑은 고딕" panose="020B0503020000020004" pitchFamily="34" charset="-127"/>
+                          <a:ea typeface="맑은 고딕" panose="020B0503020000020004" pitchFamily="34" charset="-127"/>
+                        </a:rPr>
+                        <a:t>컨트롤 씨 누르고 선택</a:t>
+                      </a:r>
+                      <a:r>
+                        <a:rPr lang="en-US" altLang="ko-KR" sz="1800" dirty="0">
+                          <a:latin typeface="맑은 고딕" panose="020B0503020000020004" pitchFamily="34" charset="-127"/>
+                          <a:ea typeface="맑은 고딕" panose="020B0503020000020004" pitchFamily="34" charset="-127"/>
+                        </a:rPr>
+                        <a:t>)</a:t>
+                      </a:r>
                       <a:endParaRPr lang="ko-KR" altLang="en-US" sz="1800" dirty="0">
                         <a:latin typeface="맑은 고딕" panose="020B0503020000020004" pitchFamily="34" charset="-127"/>
                         <a:ea typeface="맑은 고딕" panose="020B0503020000020004" pitchFamily="34" charset="-127"/>
@@ -4649,10 +4680,13 @@
                     <a:bodyPr/>
                     <a:lstStyle/>
                     <a:p>
-                      <a:endParaRPr lang="ko-KR" altLang="en-US" sz="1800" dirty="0">
-                        <a:latin typeface="맑은 고딕" panose="020B0503020000020004" pitchFamily="34" charset="-127"/>
-                        <a:ea typeface="맑은 고딕" panose="020B0503020000020004" pitchFamily="34" charset="-127"/>
-                      </a:endParaRPr>
+                      <a:r>
+                        <a:rPr lang="ko-KR" altLang="en-US" sz="1800" dirty="0">
+                          <a:latin typeface="맑은 고딕" panose="020B0503020000020004" pitchFamily="34" charset="-127"/>
+                          <a:ea typeface="맑은 고딕" panose="020B0503020000020004" pitchFamily="34" charset="-127"/>
+                        </a:rPr>
+                        <a:t>반도체 제조용 기계 제조업</a:t>
+                      </a:r>
                     </a:p>
                   </a:txBody>
                   <a:tcPr anchor="ctr">
@@ -4711,7 +4745,150 @@
                     <a:bodyPr/>
                     <a:lstStyle/>
                     <a:p>
-                      <a:endParaRPr lang="ko-KR" altLang="en-US" sz="1800" dirty="0">
+                      <a:r>
+                        <a:rPr lang="en-US" altLang="ko-KR" sz="1000" dirty="0">
+                          <a:latin typeface="맑은 고딕" panose="020B0503020000020004" pitchFamily="34" charset="-127"/>
+                          <a:ea typeface="맑은 고딕" panose="020B0503020000020004" pitchFamily="34" charset="-127"/>
+                        </a:rPr>
+                        <a:t>Python, C# (</a:t>
+                      </a:r>
+                      <a:r>
+                        <a:rPr lang="ko-KR" altLang="en-US" sz="1000" dirty="0">
+                          <a:latin typeface="맑은 고딕" panose="020B0503020000020004" pitchFamily="34" charset="-127"/>
+                          <a:ea typeface="맑은 고딕" panose="020B0503020000020004" pitchFamily="34" charset="-127"/>
+                        </a:rPr>
+                        <a:t>하나 이상 프로그래밍 언어 사용가능</a:t>
+                      </a:r>
+                      <a:r>
+                        <a:rPr lang="en-US" altLang="ko-KR" sz="1000" dirty="0">
+                          <a:latin typeface="맑은 고딕" panose="020B0503020000020004" pitchFamily="34" charset="-127"/>
+                          <a:ea typeface="맑은 고딕" panose="020B0503020000020004" pitchFamily="34" charset="-127"/>
+                        </a:rPr>
+                        <a:t>)</a:t>
+                      </a:r>
+                    </a:p>
+                    <a:p>
+                      <a:endParaRPr lang="en-US" altLang="ko-KR" sz="1000" dirty="0">
+                        <a:latin typeface="맑은 고딕" panose="020B0503020000020004" pitchFamily="34" charset="-127"/>
+                        <a:ea typeface="맑은 고딕" panose="020B0503020000020004" pitchFamily="34" charset="-127"/>
+                      </a:endParaRPr>
+                    </a:p>
+                    <a:p>
+                      <a:r>
+                        <a:rPr lang="ko-KR" altLang="en-US" sz="1000" dirty="0">
+                          <a:latin typeface="맑은 고딕" panose="020B0503020000020004" pitchFamily="34" charset="-127"/>
+                          <a:ea typeface="맑은 고딕" panose="020B0503020000020004" pitchFamily="34" charset="-127"/>
+                        </a:rPr>
+                        <a:t>테스트 자동화 도구 </a:t>
+                      </a:r>
+                      <a:r>
+                        <a:rPr lang="en-US" altLang="ko-KR" sz="1000" dirty="0">
+                          <a:latin typeface="맑은 고딕" panose="020B0503020000020004" pitchFamily="34" charset="-127"/>
+                          <a:ea typeface="맑은 고딕" panose="020B0503020000020004" pitchFamily="34" charset="-127"/>
+                        </a:rPr>
+                        <a:t>: Selenium, Robot Framework </a:t>
+                      </a:r>
+                      <a:r>
+                        <a:rPr lang="ko-KR" altLang="en-US" sz="1000" dirty="0">
+                          <a:latin typeface="맑은 고딕" panose="020B0503020000020004" pitchFamily="34" charset="-127"/>
+                          <a:ea typeface="맑은 고딕" panose="020B0503020000020004" pitchFamily="34" charset="-127"/>
+                        </a:rPr>
+                        <a:t>등</a:t>
+                      </a:r>
+                      <a:endParaRPr lang="en-US" altLang="ko-KR" sz="1000" dirty="0">
+                        <a:latin typeface="맑은 고딕" panose="020B0503020000020004" pitchFamily="34" charset="-127"/>
+                        <a:ea typeface="맑은 고딕" panose="020B0503020000020004" pitchFamily="34" charset="-127"/>
+                      </a:endParaRPr>
+                    </a:p>
+                    <a:p>
+                      <a:endParaRPr lang="en-US" altLang="ko-KR" sz="1000" dirty="0">
+                        <a:latin typeface="맑은 고딕" panose="020B0503020000020004" pitchFamily="34" charset="-127"/>
+                        <a:ea typeface="맑은 고딕" panose="020B0503020000020004" pitchFamily="34" charset="-127"/>
+                      </a:endParaRPr>
+                    </a:p>
+                    <a:p>
+                      <a:r>
+                        <a:rPr lang="ko-KR" altLang="en-US" sz="1000" dirty="0">
+                          <a:latin typeface="맑은 고딕" panose="020B0503020000020004" pitchFamily="34" charset="-127"/>
+                          <a:ea typeface="맑은 고딕" panose="020B0503020000020004" pitchFamily="34" charset="-127"/>
+                        </a:rPr>
+                        <a:t>테스트  수행</a:t>
+                      </a:r>
+                      <a:r>
+                        <a:rPr lang="en-US" altLang="ko-KR" sz="1000" dirty="0">
+                          <a:latin typeface="맑은 고딕" panose="020B0503020000020004" pitchFamily="34" charset="-127"/>
+                          <a:ea typeface="맑은 고딕" panose="020B0503020000020004" pitchFamily="34" charset="-127"/>
+                        </a:rPr>
+                        <a:t>, </a:t>
+                      </a:r>
+                    </a:p>
+                    <a:p>
+                      <a:r>
+                        <a:rPr lang="ko-KR" altLang="en-US" sz="1000" dirty="0">
+                          <a:latin typeface="맑은 고딕" panose="020B0503020000020004" pitchFamily="34" charset="-127"/>
+                          <a:ea typeface="맑은 고딕" panose="020B0503020000020004" pitchFamily="34" charset="-127"/>
+                        </a:rPr>
+                        <a:t>데이터 분석</a:t>
+                      </a:r>
+                      <a:r>
+                        <a:rPr lang="en-US" altLang="ko-KR" sz="1000" dirty="0">
+                          <a:latin typeface="맑은 고딕" panose="020B0503020000020004" pitchFamily="34" charset="-127"/>
+                          <a:ea typeface="맑은 고딕" panose="020B0503020000020004" pitchFamily="34" charset="-127"/>
+                        </a:rPr>
+                        <a:t>,</a:t>
+                      </a:r>
+                    </a:p>
+                    <a:p>
+                      <a:r>
+                        <a:rPr lang="ko-KR" altLang="en-US" sz="1000" dirty="0">
+                          <a:latin typeface="맑은 고딕" panose="020B0503020000020004" pitchFamily="34" charset="-127"/>
+                          <a:ea typeface="맑은 고딕" panose="020B0503020000020004" pitchFamily="34" charset="-127"/>
+                        </a:rPr>
+                        <a:t>프로세스 개선</a:t>
+                      </a:r>
+                      <a:endParaRPr lang="en-US" altLang="ko-KR" sz="1000" dirty="0">
+                        <a:latin typeface="맑은 고딕" panose="020B0503020000020004" pitchFamily="34" charset="-127"/>
+                        <a:ea typeface="맑은 고딕" panose="020B0503020000020004" pitchFamily="34" charset="-127"/>
+                      </a:endParaRPr>
+                    </a:p>
+                    <a:p>
+                      <a:endParaRPr lang="en-US" altLang="ko-KR" sz="1000" dirty="0">
+                        <a:latin typeface="맑은 고딕" panose="020B0503020000020004" pitchFamily="34" charset="-127"/>
+                        <a:ea typeface="맑은 고딕" panose="020B0503020000020004" pitchFamily="34" charset="-127"/>
+                      </a:endParaRPr>
+                    </a:p>
+                    <a:p>
+                      <a:r>
+                        <a:rPr lang="en-US" altLang="ko-KR" sz="1000" dirty="0">
+                          <a:latin typeface="맑은 고딕" panose="020B0503020000020004" pitchFamily="34" charset="-127"/>
+                          <a:ea typeface="맑은 고딕" panose="020B0503020000020004" pitchFamily="34" charset="-127"/>
+                        </a:rPr>
+                        <a:t>ISTQB, Six Sigma  </a:t>
+                      </a:r>
+                    </a:p>
+                    <a:p>
+                      <a:r>
+                        <a:rPr lang="ko-KR" altLang="en-US" sz="1000" dirty="0">
+                          <a:latin typeface="맑은 고딕" panose="020B0503020000020004" pitchFamily="34" charset="-127"/>
+                          <a:ea typeface="맑은 고딕" panose="020B0503020000020004" pitchFamily="34" charset="-127"/>
+                        </a:rPr>
+                        <a:t>영어회화 </a:t>
+                      </a:r>
+                      <a:r>
+                        <a:rPr lang="en-US" altLang="ko-KR" sz="1000" dirty="0">
+                          <a:latin typeface="맑은 고딕" panose="020B0503020000020004" pitchFamily="34" charset="-127"/>
+                          <a:ea typeface="맑은 고딕" panose="020B0503020000020004" pitchFamily="34" charset="-127"/>
+                        </a:rPr>
+                        <a:t>OPIC IM</a:t>
+                      </a:r>
+                      <a:r>
+                        <a:rPr lang="ko-KR" altLang="en-US" sz="1000" dirty="0">
+                          <a:latin typeface="맑은 고딕" panose="020B0503020000020004" pitchFamily="34" charset="-127"/>
+                          <a:ea typeface="맑은 고딕" panose="020B0503020000020004" pitchFamily="34" charset="-127"/>
+                        </a:rPr>
+                        <a:t>급 이상</a:t>
+                      </a:r>
+                      <a:endParaRPr lang="en-US" altLang="ko-KR" sz="1000" dirty="0">
                         <a:latin typeface="맑은 고딕" panose="020B0503020000020004" pitchFamily="34" charset="-127"/>
                         <a:ea typeface="맑은 고딕" panose="020B0503020000020004" pitchFamily="34" charset="-127"/>
                       </a:endParaRPr>
@@ -4773,10 +4950,134 @@
                     <a:bodyPr/>
                     <a:lstStyle/>
                     <a:p>
-                      <a:endParaRPr lang="ko-KR" altLang="en-US" sz="1800" dirty="0">
+                      <a:r>
+                        <a:rPr lang="ko-KR" altLang="en-US" sz="1100" dirty="0">
+                          <a:latin typeface="맑은 고딕" panose="020B0503020000020004" pitchFamily="34" charset="-127"/>
+                          <a:ea typeface="맑은 고딕" panose="020B0503020000020004" pitchFamily="34" charset="-127"/>
+                        </a:rPr>
+                        <a:t>반도체장비데이터관리</a:t>
+                      </a:r>
+                      <a:r>
+                        <a:rPr lang="en-US" altLang="ko-KR" sz="1100" dirty="0">
+                          <a:latin typeface="맑은 고딕" panose="020B0503020000020004" pitchFamily="34" charset="-127"/>
+                          <a:ea typeface="맑은 고딕" panose="020B0503020000020004" pitchFamily="34" charset="-127"/>
+                        </a:rPr>
+                        <a:t>(MySQL)</a:t>
+                      </a:r>
+                    </a:p>
+                    <a:p>
+                      <a:endParaRPr lang="en-US" altLang="ko-KR" sz="1100" dirty="0">
                         <a:latin typeface="맑은 고딕" panose="020B0503020000020004" pitchFamily="34" charset="-127"/>
                         <a:ea typeface="맑은 고딕" panose="020B0503020000020004" pitchFamily="34" charset="-127"/>
                       </a:endParaRPr>
+                    </a:p>
+                    <a:p>
+                      <a:r>
+                        <a:rPr lang="ko-KR" altLang="en-US" sz="1100" dirty="0">
+                          <a:latin typeface="맑은 고딕" panose="020B0503020000020004" pitchFamily="34" charset="-127"/>
+                          <a:ea typeface="맑은 고딕" panose="020B0503020000020004" pitchFamily="34" charset="-127"/>
+                        </a:rPr>
+                        <a:t>장비제어프로그래밍</a:t>
+                      </a:r>
+                      <a:r>
+                        <a:rPr lang="en-US" altLang="ko-KR" sz="1100" dirty="0">
+                          <a:latin typeface="맑은 고딕" panose="020B0503020000020004" pitchFamily="34" charset="-127"/>
+                          <a:ea typeface="맑은 고딕" panose="020B0503020000020004" pitchFamily="34" charset="-127"/>
+                        </a:rPr>
+                        <a:t>(C#)</a:t>
+                      </a:r>
+                    </a:p>
+                    <a:p>
+                      <a:endParaRPr lang="en-US" altLang="ko-KR" sz="1100" dirty="0">
+                        <a:latin typeface="맑은 고딕" panose="020B0503020000020004" pitchFamily="34" charset="-127"/>
+                        <a:ea typeface="맑은 고딕" panose="020B0503020000020004" pitchFamily="34" charset="-127"/>
+                      </a:endParaRPr>
+                    </a:p>
+                    <a:p>
+                      <a:r>
+                        <a:rPr lang="ko-KR" altLang="en-US" sz="1100" dirty="0">
+                          <a:latin typeface="맑은 고딕" panose="020B0503020000020004" pitchFamily="34" charset="-127"/>
+                          <a:ea typeface="맑은 고딕" panose="020B0503020000020004" pitchFamily="34" charset="-127"/>
+                        </a:rPr>
+                        <a:t>장비데이터분석프로그래밍</a:t>
+                      </a:r>
+                      <a:r>
+                        <a:rPr lang="en-US" altLang="ko-KR" sz="1100" dirty="0">
+                          <a:latin typeface="맑은 고딕" panose="020B0503020000020004" pitchFamily="34" charset="-127"/>
+                          <a:ea typeface="맑은 고딕" panose="020B0503020000020004" pitchFamily="34" charset="-127"/>
+                        </a:rPr>
+                        <a:t>(Python </a:t>
+                      </a:r>
+                      <a:r>
+                        <a:rPr lang="ko-KR" altLang="en-US" sz="1100" dirty="0">
+                          <a:latin typeface="맑은 고딕" panose="020B0503020000020004" pitchFamily="34" charset="-127"/>
+                          <a:ea typeface="맑은 고딕" panose="020B0503020000020004" pitchFamily="34" charset="-127"/>
+                        </a:rPr>
+                        <a:t>라이브러리</a:t>
+                      </a:r>
+                      <a:r>
+                        <a:rPr lang="en-US" altLang="ko-KR" sz="1100" dirty="0">
+                          <a:latin typeface="맑은 고딕" panose="020B0503020000020004" pitchFamily="34" charset="-127"/>
+                          <a:ea typeface="맑은 고딕" panose="020B0503020000020004" pitchFamily="34" charset="-127"/>
+                        </a:rPr>
+                        <a:t>)</a:t>
+                      </a:r>
+                    </a:p>
+                    <a:p>
+                      <a:endParaRPr lang="en-US" altLang="ko-KR" sz="1100" dirty="0">
+                        <a:latin typeface="맑은 고딕" panose="020B0503020000020004" pitchFamily="34" charset="-127"/>
+                        <a:ea typeface="맑은 고딕" panose="020B0503020000020004" pitchFamily="34" charset="-127"/>
+                      </a:endParaRPr>
+                    </a:p>
+                    <a:p>
+                      <a:r>
+                        <a:rPr lang="ko-KR" altLang="en-US" sz="1100" dirty="0">
+                          <a:latin typeface="맑은 고딕" panose="020B0503020000020004" pitchFamily="34" charset="-127"/>
+                          <a:ea typeface="맑은 고딕" panose="020B0503020000020004" pitchFamily="34" charset="-127"/>
+                        </a:rPr>
+                        <a:t>프레임워크활용</a:t>
+                      </a:r>
+                      <a:r>
+                        <a:rPr lang="en-US" altLang="ko-KR" sz="1100" dirty="0">
+                          <a:latin typeface="맑은 고딕" panose="020B0503020000020004" pitchFamily="34" charset="-127"/>
+                          <a:ea typeface="맑은 고딕" panose="020B0503020000020004" pitchFamily="34" charset="-127"/>
+                        </a:rPr>
+                        <a:t>_</a:t>
+                      </a:r>
+                      <a:r>
+                        <a:rPr lang="ko-KR" altLang="en-US" sz="1100" dirty="0">
+                          <a:latin typeface="맑은 고딕" panose="020B0503020000020004" pitchFamily="34" charset="-127"/>
+                          <a:ea typeface="맑은 고딕" panose="020B0503020000020004" pitchFamily="34" charset="-127"/>
+                        </a:rPr>
+                        <a:t>빅데이터</a:t>
+                      </a:r>
+                      <a:endParaRPr lang="en-US" altLang="ko-KR" sz="1100" dirty="0">
+                        <a:latin typeface="맑은 고딕" panose="020B0503020000020004" pitchFamily="34" charset="-127"/>
+                        <a:ea typeface="맑은 고딕" panose="020B0503020000020004" pitchFamily="34" charset="-127"/>
+                      </a:endParaRPr>
+                    </a:p>
+                    <a:p>
+                      <a:r>
+                        <a:rPr lang="en-US" altLang="ko-KR" sz="1100" dirty="0">
+                          <a:latin typeface="맑은 고딕" panose="020B0503020000020004" pitchFamily="34" charset="-127"/>
+                          <a:ea typeface="맑은 고딕" panose="020B0503020000020004" pitchFamily="34" charset="-127"/>
+                        </a:rPr>
+                        <a:t>(Python </a:t>
+                      </a:r>
+                      <a:r>
+                        <a:rPr lang="ko-KR" altLang="en-US" sz="1100" dirty="0">
+                          <a:latin typeface="맑은 고딕" panose="020B0503020000020004" pitchFamily="34" charset="-127"/>
+                          <a:ea typeface="맑은 고딕" panose="020B0503020000020004" pitchFamily="34" charset="-127"/>
+                        </a:rPr>
+                        <a:t>라이브러리</a:t>
+                      </a:r>
+                      <a:r>
+                        <a:rPr lang="en-US" altLang="ko-KR" sz="1100" dirty="0">
+                          <a:latin typeface="맑은 고딕" panose="020B0503020000020004" pitchFamily="34" charset="-127"/>
+                          <a:ea typeface="맑은 고딕" panose="020B0503020000020004" pitchFamily="34" charset="-127"/>
+                        </a:rPr>
+                        <a:t>)</a:t>
+                      </a:r>
                     </a:p>
                   </a:txBody>
                   <a:tcPr anchor="ctr">
@@ -4842,67 +5143,54 @@
                     <a:bodyPr/>
                     <a:lstStyle/>
                     <a:p>
-                      <a:endParaRPr lang="ko-KR" altLang="en-US" sz="1800" dirty="0">
+                      <a:pPr marL="0" marR="0" lvl="0" indent="0" algn="l" defTabSz="1219170" rtl="0" eaLnBrk="1" fontAlgn="auto" latinLnBrk="1" hangingPunct="1">
+                        <a:lnSpc>
+                          <a:spcPct val="100000"/>
+                        </a:lnSpc>
+                        <a:spcBef>
+                          <a:spcPts val="0"/>
+                        </a:spcBef>
+                        <a:spcAft>
+                          <a:spcPts val="0"/>
+                        </a:spcAft>
+                        <a:buClrTx/>
+                        <a:buSzTx/>
+                        <a:buFontTx/>
+                        <a:buNone/>
+                        <a:tabLst/>
+                        <a:defRPr/>
+                      </a:pPr>
+                      <a:endParaRPr lang="en-US" altLang="ko-KR" sz="1800" dirty="0">
                         <a:latin typeface="맑은 고딕" panose="020B0503020000020004" pitchFamily="34" charset="-127"/>
                         <a:ea typeface="맑은 고딕" panose="020B0503020000020004" pitchFamily="34" charset="-127"/>
                       </a:endParaRPr>
                     </a:p>
-                  </a:txBody>
-                  <a:tcPr anchor="ctr">
-                    <a:lnL w="6350" cap="flat" cmpd="sng" algn="ctr">
-                      <a:solidFill>
-                        <a:schemeClr val="tx1">
-                          <a:lumMod val="65000"/>
-                          <a:lumOff val="35000"/>
-                        </a:schemeClr>
-                      </a:solidFill>
-                      <a:prstDash val="solid"/>
-                      <a:round/>
-                      <a:headEnd type="none" w="med" len="med"/>
-                      <a:tailEnd type="none" w="med" len="med"/>
-                    </a:lnL>
-                    <a:lnR w="6350" cap="flat" cmpd="sng" algn="ctr">
-                      <a:solidFill>
-                        <a:schemeClr val="tx1">
-                          <a:lumMod val="65000"/>
-                          <a:lumOff val="35000"/>
-                        </a:schemeClr>
-                      </a:solidFill>
-                      <a:prstDash val="solid"/>
-                      <a:round/>
-                      <a:headEnd type="none" w="med" len="med"/>
-                      <a:tailEnd type="none" w="med" len="med"/>
-                    </a:lnR>
-                    <a:lnT w="6350" cap="flat" cmpd="sng" algn="ctr">
-                      <a:solidFill>
-                        <a:schemeClr val="tx1">
-                          <a:lumMod val="65000"/>
-                          <a:lumOff val="35000"/>
-                        </a:schemeClr>
-                      </a:solidFill>
-                      <a:prstDash val="solid"/>
-                      <a:round/>
-                      <a:headEnd type="none" w="med" len="med"/>
-                      <a:tailEnd type="none" w="med" len="med"/>
-                    </a:lnT>
-                    <a:lnB w="6350" cap="flat" cmpd="sng" algn="ctr">
-                      <a:solidFill>
-                        <a:schemeClr val="tx1">
-                          <a:lumMod val="65000"/>
-                          <a:lumOff val="35000"/>
-                        </a:schemeClr>
-                      </a:solidFill>
-                      <a:prstDash val="solid"/>
-                      <a:round/>
-                      <a:headEnd type="none" w="med" len="med"/>
-                      <a:tailEnd type="none" w="med" len="med"/>
-                    </a:lnB>
-                  </a:tcPr>
-                </a:tc>
-                <a:tc>
-                  <a:txBody>
-                    <a:bodyPr/>
-                    <a:lstStyle/>
+                    <a:p>
+                      <a:pPr marL="0" marR="0" lvl="0" indent="0" algn="l" defTabSz="1219170" rtl="0" eaLnBrk="1" fontAlgn="auto" latinLnBrk="1" hangingPunct="1">
+                        <a:lnSpc>
+                          <a:spcPct val="100000"/>
+                        </a:lnSpc>
+                        <a:spcBef>
+                          <a:spcPts val="0"/>
+                        </a:spcBef>
+                        <a:spcAft>
+                          <a:spcPts val="0"/>
+                        </a:spcAft>
+                        <a:buClrTx/>
+                        <a:buSzTx/>
+                        <a:buFontTx/>
+                        <a:buNone/>
+                        <a:tabLst/>
+                        <a:defRPr/>
+                      </a:pPr>
+                      <a:r>
+                        <a:rPr lang="ko-KR" altLang="en-US" sz="1800" dirty="0">
+                          <a:latin typeface="맑은 고딕" panose="020B0503020000020004" pitchFamily="34" charset="-127"/>
+                          <a:ea typeface="맑은 고딕" panose="020B0503020000020004" pitchFamily="34" charset="-127"/>
+                        </a:rPr>
+                        <a:t>㈜비아트론</a:t>
+                      </a:r>
+                    </a:p>
                     <a:p>
                       <a:endParaRPr lang="ko-KR" altLang="en-US" sz="1800" dirty="0">
                         <a:latin typeface="맑은 고딕" panose="020B0503020000020004" pitchFamily="34" charset="-127"/>
@@ -4966,6 +5254,14 @@
                     <a:bodyPr/>
                     <a:lstStyle/>
                     <a:p>
+                      <a:r>
+                        <a:rPr lang="ko-KR" altLang="en-US" sz="1800" dirty="0">
+                          <a:latin typeface="맑은 고딕" panose="020B0503020000020004" pitchFamily="34" charset="-127"/>
+                          <a:ea typeface="맑은 고딕" panose="020B0503020000020004" pitchFamily="34" charset="-127"/>
+                          <a:hlinkClick r:id="rId3"/>
+                        </a:rPr>
+                        <a:t>비아트론</a:t>
+                      </a:r>
                       <a:endParaRPr lang="ko-KR" altLang="en-US" sz="1800" dirty="0">
                         <a:latin typeface="맑은 고딕" panose="020B0503020000020004" pitchFamily="34" charset="-127"/>
                         <a:ea typeface="맑은 고딕" panose="020B0503020000020004" pitchFamily="34" charset="-127"/>
@@ -5028,7 +5324,19 @@
                     <a:bodyPr/>
                     <a:lstStyle/>
                     <a:p>
-                      <a:endParaRPr lang="ko-KR" altLang="en-US" sz="1800">
+                      <a:r>
+                        <a:rPr lang="ko-KR" altLang="en-US" sz="1800" b="0" i="0" kern="1200" dirty="0">
+                          <a:solidFill>
+                            <a:schemeClr val="tx1"/>
+                          </a:solidFill>
+                          <a:effectLst/>
+                          <a:latin typeface="+mn-lt"/>
+                          <a:ea typeface="+mn-ea"/>
+                          <a:cs typeface="+mn-cs"/>
+                        </a:rPr>
+                        <a:t>디스플레이 제조용 기계 제조업</a:t>
+                      </a:r>
+                      <a:endParaRPr lang="ko-KR" altLang="en-US" sz="1400" b="0" dirty="0">
                         <a:latin typeface="맑은 고딕" panose="020B0503020000020004" pitchFamily="34" charset="-127"/>
                         <a:ea typeface="맑은 고딕" panose="020B0503020000020004" pitchFamily="34" charset="-127"/>
                       </a:endParaRPr>
@@ -5089,6 +5397,319 @@
                   <a:txBody>
                     <a:bodyPr/>
                     <a:lstStyle/>
+                    <a:p>
+                      <a:r>
+                        <a:rPr lang="ko-KR" altLang="en-US" sz="1000" dirty="0">
+                          <a:latin typeface="맑은 고딕" panose="020B0503020000020004" pitchFamily="34" charset="-127"/>
+                          <a:ea typeface="맑은 고딕" panose="020B0503020000020004" pitchFamily="34" charset="-127"/>
+                        </a:rPr>
+                        <a:t>반도체 </a:t>
+                      </a:r>
+                      <a:r>
+                        <a:rPr lang="ko-KR" altLang="en-US" sz="1000" dirty="0" err="1">
+                          <a:latin typeface="맑은 고딕" panose="020B0503020000020004" pitchFamily="34" charset="-127"/>
+                          <a:ea typeface="맑은 고딕" panose="020B0503020000020004" pitchFamily="34" charset="-127"/>
+                        </a:rPr>
+                        <a:t>전공정</a:t>
+                      </a:r>
+                      <a:r>
+                        <a:rPr lang="ko-KR" altLang="en-US" sz="1000" dirty="0">
+                          <a:latin typeface="맑은 고딕" panose="020B0503020000020004" pitchFamily="34" charset="-127"/>
+                          <a:ea typeface="맑은 고딕" panose="020B0503020000020004" pitchFamily="34" charset="-127"/>
+                        </a:rPr>
+                        <a:t> 장비 </a:t>
+                      </a:r>
+                      <a:r>
+                        <a:rPr lang="en-US" altLang="ko-KR" sz="1000" dirty="0">
+                          <a:latin typeface="맑은 고딕" panose="020B0503020000020004" pitchFamily="34" charset="-127"/>
+                          <a:ea typeface="맑은 고딕" panose="020B0503020000020004" pitchFamily="34" charset="-127"/>
+                        </a:rPr>
+                        <a:t>PC</a:t>
+                      </a:r>
+                      <a:r>
+                        <a:rPr lang="ko-KR" altLang="en-US" sz="1000" dirty="0">
+                          <a:latin typeface="맑은 고딕" panose="020B0503020000020004" pitchFamily="34" charset="-127"/>
+                          <a:ea typeface="맑은 고딕" panose="020B0503020000020004" pitchFamily="34" charset="-127"/>
+                        </a:rPr>
+                        <a:t>제어 </a:t>
+                      </a:r>
+                      <a:r>
+                        <a:rPr lang="en-US" altLang="ko-KR" sz="1000" dirty="0">
+                          <a:latin typeface="맑은 고딕" panose="020B0503020000020004" pitchFamily="34" charset="-127"/>
+                          <a:ea typeface="맑은 고딕" panose="020B0503020000020004" pitchFamily="34" charset="-127"/>
+                        </a:rPr>
+                        <a:t>SW</a:t>
+                      </a:r>
+                      <a:r>
+                        <a:rPr lang="ko-KR" altLang="en-US" sz="1000" dirty="0">
+                          <a:latin typeface="맑은 고딕" panose="020B0503020000020004" pitchFamily="34" charset="-127"/>
+                          <a:ea typeface="맑은 고딕" panose="020B0503020000020004" pitchFamily="34" charset="-127"/>
+                        </a:rPr>
+                        <a:t>개발</a:t>
+                      </a:r>
+                      <a:endParaRPr lang="en-US" altLang="ko-KR" sz="1000" dirty="0">
+                        <a:latin typeface="맑은 고딕" panose="020B0503020000020004" pitchFamily="34" charset="-127"/>
+                        <a:ea typeface="맑은 고딕" panose="020B0503020000020004" pitchFamily="34" charset="-127"/>
+                      </a:endParaRPr>
+                    </a:p>
+                    <a:p>
+                      <a:endParaRPr lang="en-US" altLang="ko-KR" sz="1000" dirty="0">
+                        <a:latin typeface="맑은 고딕" panose="020B0503020000020004" pitchFamily="34" charset="-127"/>
+                        <a:ea typeface="맑은 고딕" panose="020B0503020000020004" pitchFamily="34" charset="-127"/>
+                      </a:endParaRPr>
+                    </a:p>
+                    <a:p>
+                      <a:r>
+                        <a:rPr lang="en-US" altLang="ko-KR" sz="1000" dirty="0">
+                          <a:latin typeface="맑은 고딕" panose="020B0503020000020004" pitchFamily="34" charset="-127"/>
+                          <a:ea typeface="맑은 고딕" panose="020B0503020000020004" pitchFamily="34" charset="-127"/>
+                        </a:rPr>
+                        <a:t>C, C++ </a:t>
+                      </a:r>
+                      <a:r>
+                        <a:rPr lang="en-US" altLang="ko-KR" sz="1000" dirty="0" err="1">
+                          <a:latin typeface="맑은 고딕" panose="020B0503020000020004" pitchFamily="34" charset="-127"/>
+                          <a:ea typeface="맑은 고딕" panose="020B0503020000020004" pitchFamily="34" charset="-127"/>
+                        </a:rPr>
+                        <a:t>C#,Win</a:t>
+                      </a:r>
+                      <a:r>
+                        <a:rPr lang="en-US" altLang="ko-KR" sz="1000" dirty="0">
+                          <a:latin typeface="맑은 고딕" panose="020B0503020000020004" pitchFamily="34" charset="-127"/>
+                          <a:ea typeface="맑은 고딕" panose="020B0503020000020004" pitchFamily="34" charset="-127"/>
+                        </a:rPr>
+                        <a:t> Form </a:t>
+                      </a:r>
+                    </a:p>
+                    <a:p>
+                      <a:endParaRPr lang="en-US" altLang="ko-KR" sz="1000" dirty="0">
+                        <a:latin typeface="맑은 고딕" panose="020B0503020000020004" pitchFamily="34" charset="-127"/>
+                        <a:ea typeface="맑은 고딕" panose="020B0503020000020004" pitchFamily="34" charset="-127"/>
+                      </a:endParaRPr>
+                    </a:p>
+                    <a:p>
+                      <a:r>
+                        <a:rPr lang="ko-KR" altLang="en-US" sz="1000" dirty="0">
+                          <a:latin typeface="맑은 고딕" panose="020B0503020000020004" pitchFamily="34" charset="-127"/>
+                          <a:ea typeface="맑은 고딕" panose="020B0503020000020004" pitchFamily="34" charset="-127"/>
+                        </a:rPr>
+                        <a:t>모듈 인터페이스 개발 </a:t>
+                      </a:r>
+                      <a:r>
+                        <a:rPr lang="en-US" altLang="ko-KR" sz="1000" dirty="0">
+                          <a:latin typeface="맑은 고딕" panose="020B0503020000020004" pitchFamily="34" charset="-127"/>
+                          <a:ea typeface="맑은 고딕" panose="020B0503020000020004" pitchFamily="34" charset="-127"/>
+                        </a:rPr>
+                        <a:t>(RS232,</a:t>
+                      </a:r>
+                      <a:r>
+                        <a:rPr lang="ko-KR" altLang="en-US" sz="1000" dirty="0">
+                          <a:latin typeface="맑은 고딕" panose="020B0503020000020004" pitchFamily="34" charset="-127"/>
+                          <a:ea typeface="맑은 고딕" panose="020B0503020000020004" pitchFamily="34" charset="-127"/>
+                        </a:rPr>
+                        <a:t> </a:t>
+                      </a:r>
+                      <a:r>
+                        <a:rPr lang="en-US" altLang="ko-KR" sz="1000" dirty="0">
+                          <a:latin typeface="맑은 고딕" panose="020B0503020000020004" pitchFamily="34" charset="-127"/>
+                          <a:ea typeface="맑은 고딕" panose="020B0503020000020004" pitchFamily="34" charset="-127"/>
+                        </a:rPr>
+                        <a:t>Ethernet</a:t>
+                      </a:r>
+                      <a:r>
+                        <a:rPr lang="ko-KR" altLang="en-US" sz="1000" dirty="0">
+                          <a:latin typeface="맑은 고딕" panose="020B0503020000020004" pitchFamily="34" charset="-127"/>
+                          <a:ea typeface="맑은 고딕" panose="020B0503020000020004" pitchFamily="34" charset="-127"/>
+                        </a:rPr>
+                        <a:t> 통신 등</a:t>
+                      </a:r>
+                      <a:r>
+                        <a:rPr lang="en-US" altLang="ko-KR" sz="1000" dirty="0">
+                          <a:latin typeface="맑은 고딕" panose="020B0503020000020004" pitchFamily="34" charset="-127"/>
+                          <a:ea typeface="맑은 고딕" panose="020B0503020000020004" pitchFamily="34" charset="-127"/>
+                        </a:rPr>
+                        <a:t>)</a:t>
+                      </a:r>
+                    </a:p>
+                    <a:p>
+                      <a:endParaRPr lang="en-US" altLang="ko-KR" sz="1000" dirty="0">
+                        <a:latin typeface="맑은 고딕" panose="020B0503020000020004" pitchFamily="34" charset="-127"/>
+                        <a:ea typeface="맑은 고딕" panose="020B0503020000020004" pitchFamily="34" charset="-127"/>
+                      </a:endParaRPr>
+                    </a:p>
+                    <a:p>
+                      <a:r>
+                        <a:rPr lang="ko-KR" altLang="en-US" sz="1000" dirty="0">
+                          <a:latin typeface="맑은 고딕" panose="020B0503020000020004" pitchFamily="34" charset="-127"/>
+                          <a:ea typeface="맑은 고딕" panose="020B0503020000020004" pitchFamily="34" charset="-127"/>
+                        </a:rPr>
+                        <a:t>반도체 장비 프로그램 유지보수</a:t>
+                      </a:r>
+                      <a:endParaRPr lang="en-US" altLang="ko-KR" sz="1000" dirty="0">
+                        <a:latin typeface="맑은 고딕" panose="020B0503020000020004" pitchFamily="34" charset="-127"/>
+                        <a:ea typeface="맑은 고딕" panose="020B0503020000020004" pitchFamily="34" charset="-127"/>
+                      </a:endParaRPr>
+                    </a:p>
+                    <a:p>
+                      <a:endParaRPr lang="en-US" altLang="ko-KR" sz="1000" dirty="0">
+                        <a:latin typeface="맑은 고딕" panose="020B0503020000020004" pitchFamily="34" charset="-127"/>
+                        <a:ea typeface="맑은 고딕" panose="020B0503020000020004" pitchFamily="34" charset="-127"/>
+                      </a:endParaRPr>
+                    </a:p>
+                    <a:p>
+                      <a:r>
+                        <a:rPr lang="ko-KR" altLang="en-US" sz="1000" dirty="0">
+                          <a:latin typeface="맑은 고딕" panose="020B0503020000020004" pitchFamily="34" charset="-127"/>
+                          <a:ea typeface="맑은 고딕" panose="020B0503020000020004" pitchFamily="34" charset="-127"/>
+                        </a:rPr>
+                        <a:t>반도체장비 경험</a:t>
+                      </a:r>
+                      <a:r>
+                        <a:rPr lang="en-US" altLang="ko-KR" sz="1000" dirty="0">
+                          <a:latin typeface="맑은 고딕" panose="020B0503020000020004" pitchFamily="34" charset="-127"/>
+                          <a:ea typeface="맑은 고딕" panose="020B0503020000020004" pitchFamily="34" charset="-127"/>
+                        </a:rPr>
+                        <a:t>,</a:t>
+                      </a:r>
+                    </a:p>
+                    <a:p>
+                      <a:r>
+                        <a:rPr lang="en-US" altLang="ko-KR" sz="1000" dirty="0" err="1">
+                          <a:latin typeface="맑은 고딕" panose="020B0503020000020004" pitchFamily="34" charset="-127"/>
+                          <a:ea typeface="맑은 고딕" panose="020B0503020000020004" pitchFamily="34" charset="-127"/>
+                        </a:rPr>
+                        <a:t>EasyCluster</a:t>
+                      </a:r>
+                      <a:r>
+                        <a:rPr lang="en-US" altLang="ko-KR" sz="1000" dirty="0">
+                          <a:latin typeface="맑은 고딕" panose="020B0503020000020004" pitchFamily="34" charset="-127"/>
+                          <a:ea typeface="맑은 고딕" panose="020B0503020000020004" pitchFamily="34" charset="-127"/>
+                        </a:rPr>
+                        <a:t>, </a:t>
+                      </a:r>
+                      <a:r>
+                        <a:rPr lang="en-US" altLang="ko-KR" sz="1000" dirty="0" err="1">
+                          <a:latin typeface="맑은 고딕" panose="020B0503020000020004" pitchFamily="34" charset="-127"/>
+                          <a:ea typeface="맑은 고딕" panose="020B0503020000020004" pitchFamily="34" charset="-127"/>
+                        </a:rPr>
+                        <a:t>TwinCAT</a:t>
+                      </a:r>
+                      <a:endParaRPr lang="ko-KR" altLang="en-US" sz="1000" dirty="0">
+                        <a:latin typeface="맑은 고딕" panose="020B0503020000020004" pitchFamily="34" charset="-127"/>
+                        <a:ea typeface="맑은 고딕" panose="020B0503020000020004" pitchFamily="34" charset="-127"/>
+                      </a:endParaRPr>
+                    </a:p>
+                  </a:txBody>
+                  <a:tcPr anchor="ctr">
+                    <a:lnL w="6350" cap="flat" cmpd="sng" algn="ctr">
+                      <a:solidFill>
+                        <a:schemeClr val="tx1">
+                          <a:lumMod val="65000"/>
+                          <a:lumOff val="35000"/>
+                        </a:schemeClr>
+                      </a:solidFill>
+                      <a:prstDash val="solid"/>
+                      <a:round/>
+                      <a:headEnd type="none" w="med" len="med"/>
+                      <a:tailEnd type="none" w="med" len="med"/>
+                    </a:lnL>
+                    <a:lnR w="6350" cap="flat" cmpd="sng" algn="ctr">
+                      <a:solidFill>
+                        <a:schemeClr val="tx1">
+                          <a:lumMod val="65000"/>
+                          <a:lumOff val="35000"/>
+                        </a:schemeClr>
+                      </a:solidFill>
+                      <a:prstDash val="solid"/>
+                      <a:round/>
+                      <a:headEnd type="none" w="med" len="med"/>
+                      <a:tailEnd type="none" w="med" len="med"/>
+                    </a:lnR>
+                    <a:lnT w="6350" cap="flat" cmpd="sng" algn="ctr">
+                      <a:solidFill>
+                        <a:schemeClr val="tx1">
+                          <a:lumMod val="65000"/>
+                          <a:lumOff val="35000"/>
+                        </a:schemeClr>
+                      </a:solidFill>
+                      <a:prstDash val="solid"/>
+                      <a:round/>
+                      <a:headEnd type="none" w="med" len="med"/>
+                      <a:tailEnd type="none" w="med" len="med"/>
+                    </a:lnT>
+                    <a:lnB w="6350" cap="flat" cmpd="sng" algn="ctr">
+                      <a:solidFill>
+                        <a:schemeClr val="tx1">
+                          <a:lumMod val="65000"/>
+                          <a:lumOff val="35000"/>
+                        </a:schemeClr>
+                      </a:solidFill>
+                      <a:prstDash val="solid"/>
+                      <a:round/>
+                      <a:headEnd type="none" w="med" len="med"/>
+                      <a:tailEnd type="none" w="med" len="med"/>
+                    </a:lnB>
+                  </a:tcPr>
+                </a:tc>
+                <a:tc>
+                  <a:txBody>
+                    <a:bodyPr/>
+                    <a:lstStyle/>
+                    <a:p>
+                      <a:r>
+                        <a:rPr lang="ko-KR" altLang="en-US" sz="1100" dirty="0">
+                          <a:latin typeface="맑은 고딕" panose="020B0503020000020004" pitchFamily="34" charset="-127"/>
+                          <a:ea typeface="맑은 고딕" panose="020B0503020000020004" pitchFamily="34" charset="-127"/>
+                        </a:rPr>
+                        <a:t>반도체장비프로그래밍</a:t>
+                      </a:r>
+                      <a:r>
+                        <a:rPr lang="en-US" altLang="ko-KR" sz="1100" dirty="0">
+                          <a:latin typeface="맑은 고딕" panose="020B0503020000020004" pitchFamily="34" charset="-127"/>
+                          <a:ea typeface="맑은 고딕" panose="020B0503020000020004" pitchFamily="34" charset="-127"/>
+                        </a:rPr>
+                        <a:t>(C)</a:t>
+                      </a:r>
+                    </a:p>
+                    <a:p>
+                      <a:endParaRPr lang="en-US" altLang="ko-KR" sz="1100" dirty="0">
+                        <a:latin typeface="맑은 고딕" panose="020B0503020000020004" pitchFamily="34" charset="-127"/>
+                        <a:ea typeface="맑은 고딕" panose="020B0503020000020004" pitchFamily="34" charset="-127"/>
+                      </a:endParaRPr>
+                    </a:p>
+                    <a:p>
+                      <a:pPr marL="0" marR="0" lvl="0" indent="0" algn="l" defTabSz="1219170" rtl="0" eaLnBrk="1" fontAlgn="auto" latinLnBrk="1" hangingPunct="1">
+                        <a:lnSpc>
+                          <a:spcPct val="100000"/>
+                        </a:lnSpc>
+                        <a:spcBef>
+                          <a:spcPts val="0"/>
+                        </a:spcBef>
+                        <a:spcAft>
+                          <a:spcPts val="0"/>
+                        </a:spcAft>
+                        <a:buClrTx/>
+                        <a:buSzTx/>
+                        <a:buFontTx/>
+                        <a:buNone/>
+                        <a:tabLst/>
+                        <a:defRPr/>
+                      </a:pPr>
+                      <a:r>
+                        <a:rPr lang="ko-KR" altLang="en-US" sz="1100" dirty="0">
+                          <a:latin typeface="맑은 고딕" panose="020B0503020000020004" pitchFamily="34" charset="-127"/>
+                          <a:ea typeface="맑은 고딕" panose="020B0503020000020004" pitchFamily="34" charset="-127"/>
+                        </a:rPr>
+                        <a:t>장비제어프로그래밍</a:t>
+                      </a:r>
+                      <a:r>
+                        <a:rPr lang="en-US" altLang="ko-KR" sz="1100" dirty="0">
+                          <a:latin typeface="맑은 고딕" panose="020B0503020000020004" pitchFamily="34" charset="-127"/>
+                          <a:ea typeface="맑은 고딕" panose="020B0503020000020004" pitchFamily="34" charset="-127"/>
+                        </a:rPr>
+                        <a:t>(C#)</a:t>
+                      </a:r>
+                    </a:p>
                     <a:p>
                       <a:endParaRPr lang="ko-KR" altLang="en-US" sz="1800" dirty="0">
                         <a:latin typeface="맑은 고딕" panose="020B0503020000020004" pitchFamily="34" charset="-127"/>
@@ -5159,6 +5780,20 @@
                     <a:bodyPr/>
                     <a:lstStyle/>
                     <a:p>
+                      <a:r>
+                        <a:rPr lang="ko-KR" altLang="en-US" sz="1800" dirty="0">
+                          <a:latin typeface="맑은 고딕" panose="020B0503020000020004" pitchFamily="34" charset="-127"/>
+                          <a:ea typeface="맑은 고딕" panose="020B0503020000020004" pitchFamily="34" charset="-127"/>
+                        </a:rPr>
+                        <a:t>㈜</a:t>
+                      </a:r>
+                      <a:r>
+                        <a:rPr lang="ko-KR" altLang="en-US" sz="1800" dirty="0" err="1">
+                          <a:latin typeface="맑은 고딕" panose="020B0503020000020004" pitchFamily="34" charset="-127"/>
+                          <a:ea typeface="맑은 고딕" panose="020B0503020000020004" pitchFamily="34" charset="-127"/>
+                        </a:rPr>
+                        <a:t>시스템알앤디</a:t>
+                      </a:r>
                       <a:endParaRPr lang="ko-KR" altLang="en-US" sz="1800" dirty="0">
                         <a:latin typeface="맑은 고딕" panose="020B0503020000020004" pitchFamily="34" charset="-127"/>
                         <a:ea typeface="맑은 고딕" panose="020B0503020000020004" pitchFamily="34" charset="-127"/>
@@ -5221,7 +5856,15 @@
                     <a:bodyPr/>
                     <a:lstStyle/>
                     <a:p>
-                      <a:endParaRPr lang="ko-KR" altLang="en-US" sz="1800">
+                      <a:r>
+                        <a:rPr lang="ko-KR" altLang="en-US" sz="1800" dirty="0" err="1">
+                          <a:latin typeface="맑은 고딕" panose="020B0503020000020004" pitchFamily="34" charset="-127"/>
+                          <a:ea typeface="맑은 고딕" panose="020B0503020000020004" pitchFamily="34" charset="-127"/>
+                          <a:hlinkClick r:id="rId4"/>
+                        </a:rPr>
+                        <a:t>시스템알앤디</a:t>
+                      </a:r>
+                      <a:endParaRPr lang="ko-KR" altLang="en-US" sz="1800" dirty="0">
                         <a:latin typeface="맑은 고딕" panose="020B0503020000020004" pitchFamily="34" charset="-127"/>
                         <a:ea typeface="맑은 고딕" panose="020B0503020000020004" pitchFamily="34" charset="-127"/>
                       </a:endParaRPr>
@@ -5283,6 +5926,20 @@
                     <a:bodyPr/>
                     <a:lstStyle/>
                     <a:p>
+                      <a:r>
+                        <a:rPr lang="ko-KR" altLang="en-US" sz="1800" dirty="0">
+                          <a:latin typeface="맑은 고딕" panose="020B0503020000020004" pitchFamily="34" charset="-127"/>
+                          <a:ea typeface="맑은 고딕" panose="020B0503020000020004" pitchFamily="34" charset="-127"/>
+                        </a:rPr>
+                        <a:t>비주거용 건물 </a:t>
+                      </a:r>
+                      <a:r>
+                        <a:rPr lang="ko-KR" altLang="en-US" sz="1800" dirty="0" err="1">
+                          <a:latin typeface="맑은 고딕" panose="020B0503020000020004" pitchFamily="34" charset="-127"/>
+                          <a:ea typeface="맑은 고딕" panose="020B0503020000020004" pitchFamily="34" charset="-127"/>
+                        </a:rPr>
+                        <a:t>입대업</a:t>
+                      </a:r>
                       <a:endParaRPr lang="ko-KR" altLang="en-US" sz="1800" dirty="0">
                         <a:latin typeface="맑은 고딕" panose="020B0503020000020004" pitchFamily="34" charset="-127"/>
                         <a:ea typeface="맑은 고딕" panose="020B0503020000020004" pitchFamily="34" charset="-127"/>
@@ -5345,10 +6002,20 @@
                     <a:bodyPr/>
                     <a:lstStyle/>
                     <a:p>
-                      <a:endParaRPr lang="ko-KR" altLang="en-US" sz="1800" dirty="0">
-                        <a:latin typeface="맑은 고딕" panose="020B0503020000020004" pitchFamily="34" charset="-127"/>
-                        <a:ea typeface="맑은 고딕" panose="020B0503020000020004" pitchFamily="34" charset="-127"/>
-                      </a:endParaRPr>
+                      <a:r>
+                        <a:rPr lang="en-US" altLang="ko-KR" sz="1000" dirty="0">
+                          <a:latin typeface="맑은 고딕" panose="020B0503020000020004" pitchFamily="34" charset="-127"/>
+                          <a:ea typeface="맑은 고딕" panose="020B0503020000020004" pitchFamily="34" charset="-127"/>
+                        </a:rPr>
+                        <a:t>C++, C# </a:t>
+                      </a:r>
+                      <a:r>
+                        <a:rPr lang="ko-KR" altLang="en-US" sz="1000" dirty="0">
+                          <a:latin typeface="맑은 고딕" panose="020B0503020000020004" pitchFamily="34" charset="-127"/>
+                          <a:ea typeface="맑은 고딕" panose="020B0503020000020004" pitchFamily="34" charset="-127"/>
+                        </a:rPr>
+                        <a:t>사용가능자 </a:t>
+                      </a:r>
                     </a:p>
                   </a:txBody>
                   <a:tcPr anchor="ctr">
@@ -5406,6 +6073,62 @@
                   <a:txBody>
                     <a:bodyPr/>
                     <a:lstStyle/>
+                    <a:p>
+                      <a:pPr marL="0" marR="0" lvl="0" indent="0" algn="l" defTabSz="1219170" rtl="0" eaLnBrk="1" fontAlgn="auto" latinLnBrk="1" hangingPunct="1">
+                        <a:lnSpc>
+                          <a:spcPct val="100000"/>
+                        </a:lnSpc>
+                        <a:spcBef>
+                          <a:spcPts val="0"/>
+                        </a:spcBef>
+                        <a:spcAft>
+                          <a:spcPts val="0"/>
+                        </a:spcAft>
+                        <a:buClrTx/>
+                        <a:buSzTx/>
+                        <a:buFontTx/>
+                        <a:buNone/>
+                        <a:tabLst/>
+                        <a:defRPr/>
+                      </a:pPr>
+                      <a:endParaRPr lang="en-US" altLang="ko-KR" sz="1100" dirty="0">
+                        <a:latin typeface="맑은 고딕" panose="020B0503020000020004" pitchFamily="34" charset="-127"/>
+                        <a:ea typeface="맑은 고딕" panose="020B0503020000020004" pitchFamily="34" charset="-127"/>
+                      </a:endParaRPr>
+                    </a:p>
+                    <a:p>
+                      <a:pPr marL="0" marR="0" lvl="0" indent="0" algn="l" defTabSz="1219170" rtl="0" eaLnBrk="1" fontAlgn="auto" latinLnBrk="1" hangingPunct="1">
+                        <a:lnSpc>
+                          <a:spcPct val="100000"/>
+                        </a:lnSpc>
+                        <a:spcBef>
+                          <a:spcPts val="0"/>
+                        </a:spcBef>
+                        <a:spcAft>
+                          <a:spcPts val="0"/>
+                        </a:spcAft>
+                        <a:buClrTx/>
+                        <a:buSzTx/>
+                        <a:buFontTx/>
+                        <a:buNone/>
+                        <a:tabLst/>
+                        <a:defRPr/>
+                      </a:pPr>
+                      <a:r>
+                        <a:rPr lang="ko-KR" altLang="en-US" sz="1100" dirty="0">
+                          <a:latin typeface="맑은 고딕" panose="020B0503020000020004" pitchFamily="34" charset="-127"/>
+                          <a:ea typeface="맑은 고딕" panose="020B0503020000020004" pitchFamily="34" charset="-127"/>
+                        </a:rPr>
+                        <a:t>반도체장비프로그래밍</a:t>
+                      </a:r>
+                      <a:r>
+                        <a:rPr lang="en-US" altLang="ko-KR" sz="1100" dirty="0">
+                          <a:latin typeface="맑은 고딕" panose="020B0503020000020004" pitchFamily="34" charset="-127"/>
+                          <a:ea typeface="맑은 고딕" panose="020B0503020000020004" pitchFamily="34" charset="-127"/>
+                        </a:rPr>
+                        <a:t>(C)</a:t>
+                      </a:r>
+                    </a:p>
                     <a:p>
                       <a:endParaRPr lang="ko-KR" altLang="en-US" sz="1800" dirty="0">
                         <a:latin typeface="맑은 고딕" panose="020B0503020000020004" pitchFamily="34" charset="-127"/>
@@ -5520,7 +6243,7 @@
           <a:lstStyle/>
           <a:p>
             <a:r>
-              <a:rPr lang="ko-KR" altLang="en-US" b="1" dirty="0" smtClean="0">
+              <a:rPr lang="ko-KR" altLang="en-US" b="1" dirty="0">
                 <a:solidFill>
                   <a:schemeClr val="tx1"/>
                 </a:solidFill>
@@ -5530,16 +6253,6 @@
               <a:t>실습 </a:t>
             </a:r>
             <a:r>
-              <a:rPr lang="en-US" altLang="ko-KR" b="1" dirty="0" smtClean="0">
-                <a:solidFill>
-                  <a:schemeClr val="tx1"/>
-                </a:solidFill>
-                <a:latin typeface="맑은 고딕" panose="020B0503020000020004" pitchFamily="34" charset="-127"/>
-                <a:ea typeface="맑은 고딕" panose="020B0503020000020004" pitchFamily="34" charset="-127"/>
-              </a:rPr>
-              <a:t>2</a:t>
-            </a:r>
-            <a:r>
               <a:rPr lang="en-US" altLang="ko-KR" b="1" dirty="0">
                 <a:solidFill>
                   <a:schemeClr val="tx1"/>
@@ -5547,7 +6260,7 @@
                 <a:latin typeface="맑은 고딕" panose="020B0503020000020004" pitchFamily="34" charset="-127"/>
                 <a:ea typeface="맑은 고딕" panose="020B0503020000020004" pitchFamily="34" charset="-127"/>
               </a:rPr>
-              <a:t>. </a:t>
+              <a:t>2. </a:t>
             </a:r>
             <a:r>
               <a:rPr lang="ko-KR" altLang="en-US" b="1" dirty="0">
@@ -5577,32 +6290,25 @@
           <a:lstStyle/>
           <a:p>
             <a:r>
-              <a:rPr lang="ko-KR" altLang="en-US" sz="2400" b="1" spc="-150" dirty="0" smtClean="0">
+              <a:rPr lang="ko-KR" altLang="en-US" sz="2400" b="1" spc="-150" dirty="0">
                 <a:latin typeface="맑은 고딕" panose="020B0503020000020004" pitchFamily="34" charset="-127"/>
                 <a:ea typeface="맑은 고딕" panose="020B0503020000020004" pitchFamily="34" charset="-127"/>
               </a:rPr>
               <a:t>활동</a:t>
             </a:r>
             <a:r>
-              <a:rPr lang="en-US" altLang="ko-KR" sz="2400" b="1" spc="-150" dirty="0" smtClean="0">
+              <a:rPr lang="en-US" altLang="ko-KR" sz="2400" b="1" spc="-150" dirty="0">
                 <a:latin typeface="맑은 고딕" panose="020B0503020000020004" pitchFamily="34" charset="-127"/>
                 <a:ea typeface="맑은 고딕" panose="020B0503020000020004" pitchFamily="34" charset="-127"/>
               </a:rPr>
               <a:t>: </a:t>
             </a:r>
             <a:r>
-              <a:rPr lang="ko-KR" altLang="en-US" sz="2400" spc="-150" dirty="0" smtClean="0">
-                <a:latin typeface="맑은 고딕" panose="020B0503020000020004" pitchFamily="34" charset="-127"/>
-                <a:ea typeface="맑은 고딕" panose="020B0503020000020004" pitchFamily="34" charset="-127"/>
-              </a:rPr>
-              <a:t>관심 </a:t>
-            </a:r>
-            <a:r>
               <a:rPr lang="ko-KR" altLang="en-US" sz="2400" spc="-150" dirty="0">
                 <a:latin typeface="맑은 고딕" panose="020B0503020000020004" pitchFamily="34" charset="-127"/>
                 <a:ea typeface="맑은 고딕" panose="020B0503020000020004" pitchFamily="34" charset="-127"/>
               </a:rPr>
-              <a:t>공고에 나온 회사 </a:t>
+              <a:t>관심 공고에 나온 회사 </a:t>
             </a:r>
             <a:r>
               <a:rPr lang="en-US" altLang="ko-KR" sz="2400" spc="-150" dirty="0">
@@ -5619,7 +6325,7 @@
               <a:t>개를 선택해서 홈페이지를 본다</a:t>
             </a:r>
             <a:r>
-              <a:rPr lang="en-US" altLang="ko-KR" sz="2400" spc="-150" dirty="0" smtClean="0">
+              <a:rPr lang="en-US" altLang="ko-KR" sz="2400" spc="-150" dirty="0">
                 <a:latin typeface="맑은 고딕" panose="020B0503020000020004" pitchFamily="34" charset="-127"/>
                 <a:ea typeface="맑은 고딕" panose="020B0503020000020004" pitchFamily="34" charset="-127"/>
               </a:rPr>
@@ -5628,23 +6334,19 @@
           </a:p>
           <a:p>
             <a:r>
-              <a:rPr lang="ko-KR" altLang="en-US" sz="2400" b="1" spc="-150" dirty="0" smtClean="0">
+              <a:rPr lang="ko-KR" altLang="en-US" sz="2400" b="1" spc="-150" dirty="0">
                 <a:latin typeface="맑은 고딕" panose="020B0503020000020004" pitchFamily="34" charset="-127"/>
                 <a:ea typeface="맑은 고딕" panose="020B0503020000020004" pitchFamily="34" charset="-127"/>
               </a:rPr>
               <a:t>결과물</a:t>
             </a:r>
             <a:r>
-              <a:rPr lang="en-US" altLang="ko-KR" sz="2400" b="1" spc="-150" dirty="0" smtClean="0">
+              <a:rPr lang="en-US" altLang="ko-KR" sz="2400" b="1" spc="-150" dirty="0">
                 <a:latin typeface="맑은 고딕" panose="020B0503020000020004" pitchFamily="34" charset="-127"/>
                 <a:ea typeface="맑은 고딕" panose="020B0503020000020004" pitchFamily="34" charset="-127"/>
               </a:rPr>
               <a:t>: </a:t>
             </a:r>
-            <a:endParaRPr lang="en-US" altLang="ko-KR" sz="2400" b="1" spc="-150" dirty="0">
-              <a:latin typeface="맑은 고딕" panose="020B0503020000020004" pitchFamily="34" charset="-127"/>
-              <a:ea typeface="맑은 고딕" panose="020B0503020000020004" pitchFamily="34" charset="-127"/>
-            </a:endParaRPr>
           </a:p>
           <a:p>
             <a:endParaRPr lang="ko-KR" altLang="en-US" sz="2400" spc="-150" dirty="0">
@@ -5663,7 +6365,7 @@
           <p:nvPr>
             <p:extLst>
               <p:ext uri="{D42A27DB-BD31-4B8C-83A1-F6EECF244321}">
-                <p14:modId xmlns:p14="http://schemas.microsoft.com/office/powerpoint/2010/main" val="3649082517"/>
+                <p14:modId xmlns:p14="http://schemas.microsoft.com/office/powerpoint/2010/main" val="2365565560"/>
               </p:ext>
             </p:extLst>
           </p:nvPr>
@@ -5910,10 +6612,13 @@
                     <a:bodyPr/>
                     <a:lstStyle/>
                     <a:p>
-                      <a:endParaRPr lang="ko-KR" altLang="en-US" sz="2000" dirty="0">
-                        <a:latin typeface="맑은 고딕" panose="020B0503020000020004" pitchFamily="34" charset="-127"/>
-                        <a:ea typeface="맑은 고딕" panose="020B0503020000020004" pitchFamily="34" charset="-127"/>
-                      </a:endParaRPr>
+                      <a:r>
+                        <a:rPr lang="ko-KR" altLang="en-US" sz="2000" dirty="0">
+                          <a:latin typeface="맑은 고딕" panose="020B0503020000020004" pitchFamily="34" charset="-127"/>
+                          <a:ea typeface="맑은 고딕" panose="020B0503020000020004" pitchFamily="34" charset="-127"/>
+                        </a:rPr>
+                        <a:t>반도체 제조용 기계 제조</a:t>
+                      </a:r>
                     </a:p>
                   </a:txBody>
                   <a:tcPr anchor="ctr">
@@ -6058,10 +6763,13 @@
                     <a:bodyPr/>
                     <a:lstStyle/>
                     <a:p>
-                      <a:endParaRPr lang="ko-KR" altLang="en-US" sz="2000" dirty="0">
-                        <a:latin typeface="맑은 고딕" panose="020B0503020000020004" pitchFamily="34" charset="-127"/>
-                        <a:ea typeface="맑은 고딕" panose="020B0503020000020004" pitchFamily="34" charset="-127"/>
-                      </a:endParaRPr>
+                      <a:r>
+                        <a:rPr lang="ko-KR" altLang="en-US" sz="2000" dirty="0">
+                          <a:latin typeface="맑은 고딕" panose="020B0503020000020004" pitchFamily="34" charset="-127"/>
+                          <a:ea typeface="맑은 고딕" panose="020B0503020000020004" pitchFamily="34" charset="-127"/>
+                        </a:rPr>
+                        <a:t>반도체</a:t>
+                      </a:r>
                     </a:p>
                   </a:txBody>
                   <a:tcPr anchor="ctr">
@@ -6128,7 +6836,7 @@
                     <a:lstStyle/>
                     <a:p>
                       <a:r>
-                        <a:rPr lang="ko-KR" altLang="en-US" sz="2000">
+                        <a:rPr lang="ko-KR" altLang="en-US" sz="2000" dirty="0">
                           <a:latin typeface="맑은 고딕" panose="020B0503020000020004" pitchFamily="34" charset="-127"/>
                           <a:ea typeface="맑은 고딕" panose="020B0503020000020004" pitchFamily="34" charset="-127"/>
                         </a:rPr>
@@ -6192,7 +6900,39 @@
                     <a:bodyPr/>
                     <a:lstStyle/>
                     <a:p>
-                      <a:endParaRPr lang="ko-KR" altLang="en-US" sz="2000" dirty="0">
+                      <a:r>
+                        <a:rPr lang="en-US" altLang="ko-KR" sz="1400" dirty="0"/>
+                        <a:t>QA </a:t>
+                      </a:r>
+                      <a:r>
+                        <a:rPr lang="ko-KR" altLang="en-US" sz="1400" dirty="0"/>
+                        <a:t>엔지니어 </a:t>
+                      </a:r>
+                      <a:r>
+                        <a:rPr lang="en-US" altLang="ko-KR" sz="1400" dirty="0"/>
+                        <a:t>(QA Engineer),</a:t>
+                      </a:r>
+                      <a:r>
+                        <a:rPr lang="ko-KR" altLang="en-US" sz="1400" dirty="0"/>
+                        <a:t> </a:t>
+                      </a:r>
+                      <a:r>
+                        <a:rPr lang="en-US" altLang="ko-KR" sz="1400" dirty="0"/>
+                        <a:t>QA </a:t>
+                      </a:r>
+                      <a:r>
+                        <a:rPr lang="ko-KR" altLang="en-US" sz="1400" dirty="0"/>
+                        <a:t>자동화 엔지니어 </a:t>
+                      </a:r>
+                      <a:r>
+                        <a:rPr lang="en-US" altLang="ko-KR" sz="1400" dirty="0"/>
+                        <a:t>/ SET, QA </a:t>
+                      </a:r>
+                      <a:r>
+                        <a:rPr lang="ko-KR" altLang="en-US" sz="1400" dirty="0"/>
+                        <a:t>매니저 </a:t>
+                      </a:r>
+                      <a:endParaRPr lang="ko-KR" altLang="en-US" sz="1400" dirty="0">
                         <a:latin typeface="맑은 고딕" panose="020B0503020000020004" pitchFamily="34" charset="-127"/>
                         <a:ea typeface="맑은 고딕" panose="020B0503020000020004" pitchFamily="34" charset="-127"/>
                       </a:endParaRPr>
@@ -6326,10 +7066,69 @@
                     <a:bodyPr/>
                     <a:lstStyle/>
                     <a:p>
-                      <a:endParaRPr lang="ko-KR" altLang="en-US" sz="2000" dirty="0">
-                        <a:latin typeface="맑은 고딕" panose="020B0503020000020004" pitchFamily="34" charset="-127"/>
-                        <a:ea typeface="맑은 고딕" panose="020B0503020000020004" pitchFamily="34" charset="-127"/>
-                      </a:endParaRPr>
+                      <a:r>
+                        <a:rPr lang="en-US" altLang="ko-KR" sz="1200" dirty="0">
+                          <a:latin typeface="맑은 고딕" panose="020B0503020000020004" pitchFamily="34" charset="-127"/>
+                          <a:ea typeface="맑은 고딕" panose="020B0503020000020004" pitchFamily="34" charset="-127"/>
+                        </a:rPr>
+                        <a:t>Python, C# </a:t>
+                      </a:r>
+                      <a:r>
+                        <a:rPr lang="ko-KR" altLang="en-US" sz="1200" dirty="0">
+                          <a:latin typeface="맑은 고딕" panose="020B0503020000020004" pitchFamily="34" charset="-127"/>
+                          <a:ea typeface="맑은 고딕" panose="020B0503020000020004" pitchFamily="34" charset="-127"/>
+                        </a:rPr>
+                        <a:t>언어사용가능</a:t>
+                      </a:r>
+                      <a:r>
+                        <a:rPr lang="en-US" altLang="ko-KR" sz="1200" dirty="0">
+                          <a:latin typeface="맑은 고딕" panose="020B0503020000020004" pitchFamily="34" charset="-127"/>
+                          <a:ea typeface="맑은 고딕" panose="020B0503020000020004" pitchFamily="34" charset="-127"/>
+                        </a:rPr>
+                        <a:t>, </a:t>
+                      </a:r>
+                      <a:r>
+                        <a:rPr lang="ko-KR" altLang="en-US" sz="1200" dirty="0">
+                          <a:latin typeface="맑은 고딕" panose="020B0503020000020004" pitchFamily="34" charset="-127"/>
+                          <a:ea typeface="맑은 고딕" panose="020B0503020000020004" pitchFamily="34" charset="-127"/>
+                        </a:rPr>
+                        <a:t>테스트 자동화도구 활용</a:t>
+                      </a:r>
+                      <a:r>
+                        <a:rPr lang="en-US" altLang="ko-KR" sz="1200" dirty="0">
+                          <a:latin typeface="맑은 고딕" panose="020B0503020000020004" pitchFamily="34" charset="-127"/>
+                          <a:ea typeface="맑은 고딕" panose="020B0503020000020004" pitchFamily="34" charset="-127"/>
+                        </a:rPr>
+                        <a:t>, Six Sigma, </a:t>
+                      </a:r>
+                      <a:r>
+                        <a:rPr lang="ko-KR" altLang="en-US" sz="1200" dirty="0">
+                          <a:latin typeface="맑은 고딕" panose="020B0503020000020004" pitchFamily="34" charset="-127"/>
+                          <a:ea typeface="맑은 고딕" panose="020B0503020000020004" pitchFamily="34" charset="-127"/>
+                        </a:rPr>
+                        <a:t>영어회화 </a:t>
+                      </a:r>
+                      <a:r>
+                        <a:rPr lang="en-US" altLang="ko-KR" sz="1200" dirty="0" err="1">
+                          <a:latin typeface="맑은 고딕" panose="020B0503020000020004" pitchFamily="34" charset="-127"/>
+                          <a:ea typeface="맑은 고딕" panose="020B0503020000020004" pitchFamily="34" charset="-127"/>
+                        </a:rPr>
+                        <a:t>Opic</a:t>
+                      </a:r>
+                      <a:r>
+                        <a:rPr lang="en-US" altLang="ko-KR" sz="1200" dirty="0">
+                          <a:latin typeface="맑은 고딕" panose="020B0503020000020004" pitchFamily="34" charset="-127"/>
+                          <a:ea typeface="맑은 고딕" panose="020B0503020000020004" pitchFamily="34" charset="-127"/>
+                        </a:rPr>
+                        <a:t> IM</a:t>
+                      </a:r>
+                      <a:r>
+                        <a:rPr lang="ko-KR" altLang="en-US" sz="1200" dirty="0">
+                          <a:latin typeface="맑은 고딕" panose="020B0503020000020004" pitchFamily="34" charset="-127"/>
+                          <a:ea typeface="맑은 고딕" panose="020B0503020000020004" pitchFamily="34" charset="-127"/>
+                        </a:rPr>
+                        <a:t>급 이상</a:t>
+                      </a:r>
                     </a:p>
                   </a:txBody>
                   <a:tcPr anchor="ctr">
@@ -6460,6 +7259,41 @@
                     <a:bodyPr/>
                     <a:lstStyle/>
                     <a:p>
+                      <a:r>
+                        <a:rPr lang="ko-KR" altLang="en-US" sz="2000" dirty="0">
+                          <a:latin typeface="맑은 고딕" panose="020B0503020000020004" pitchFamily="34" charset="-127"/>
+                          <a:ea typeface="맑은 고딕" panose="020B0503020000020004" pitchFamily="34" charset="-127"/>
+                        </a:rPr>
+                        <a:t>테스트 자동화 도구 활용</a:t>
+                      </a:r>
+                      <a:r>
+                        <a:rPr lang="en-US" altLang="ko-KR" sz="2000" dirty="0">
+                          <a:latin typeface="맑은 고딕" panose="020B0503020000020004" pitchFamily="34" charset="-127"/>
+                          <a:ea typeface="맑은 고딕" panose="020B0503020000020004" pitchFamily="34" charset="-127"/>
+                        </a:rPr>
+                        <a:t>, Six Sigma, </a:t>
+                      </a:r>
+                      <a:r>
+                        <a:rPr lang="ko-KR" altLang="en-US" sz="2000" dirty="0">
+                          <a:latin typeface="맑은 고딕" panose="020B0503020000020004" pitchFamily="34" charset="-127"/>
+                          <a:ea typeface="맑은 고딕" panose="020B0503020000020004" pitchFamily="34" charset="-127"/>
+                        </a:rPr>
+                        <a:t>영어회화 </a:t>
+                      </a:r>
+                      <a:r>
+                        <a:rPr lang="en-US" altLang="ko-KR" sz="2000" dirty="0" err="1">
+                          <a:latin typeface="맑은 고딕" panose="020B0503020000020004" pitchFamily="34" charset="-127"/>
+                          <a:ea typeface="맑은 고딕" panose="020B0503020000020004" pitchFamily="34" charset="-127"/>
+                        </a:rPr>
+                        <a:t>OPic</a:t>
+                      </a:r>
+                      <a:r>
+                        <a:rPr lang="en-US" altLang="ko-KR" sz="2000" dirty="0">
+                          <a:latin typeface="맑은 고딕" panose="020B0503020000020004" pitchFamily="34" charset="-127"/>
+                          <a:ea typeface="맑은 고딕" panose="020B0503020000020004" pitchFamily="34" charset="-127"/>
+                        </a:rPr>
+                        <a:t> </a:t>
+                      </a:r>
                       <a:endParaRPr lang="ko-KR" altLang="en-US" sz="2000" dirty="0">
                         <a:latin typeface="맑은 고딕" panose="020B0503020000020004" pitchFamily="34" charset="-127"/>
                         <a:ea typeface="맑은 고딕" panose="020B0503020000020004" pitchFamily="34" charset="-127"/>
@@ -6573,7 +7407,7 @@
           <a:lstStyle/>
           <a:p>
             <a:r>
-              <a:rPr lang="ko-KR" altLang="en-US" b="1" dirty="0" smtClean="0">
+              <a:rPr lang="ko-KR" altLang="en-US" b="1" dirty="0">
                 <a:solidFill>
                   <a:schemeClr val="tx1"/>
                 </a:solidFill>
@@ -6583,7 +7417,7 @@
               <a:t>최종 결과물</a:t>
             </a:r>
             <a:r>
-              <a:rPr lang="en-US" altLang="ko-KR" b="1" dirty="0" smtClean="0">
+              <a:rPr lang="en-US" altLang="ko-KR" b="1" dirty="0">
                 <a:solidFill>
                   <a:schemeClr val="tx1"/>
                 </a:solidFill>
@@ -6593,30 +7427,26 @@
               <a:t>: </a:t>
             </a:r>
             <a:r>
-              <a:rPr lang="ko-KR" altLang="en-US" b="1" dirty="0" smtClean="0">
+              <a:rPr lang="ko-KR" altLang="en-US" b="1" dirty="0">
                 <a:latin typeface="맑은 고딕" panose="020B0503020000020004" pitchFamily="34" charset="-127"/>
                 <a:ea typeface="맑은 고딕" panose="020B0503020000020004" pitchFamily="34" charset="-127"/>
               </a:rPr>
               <a:t>지원 실습할 회사</a:t>
             </a:r>
             <a:r>
-              <a:rPr lang="en-US" altLang="ko-KR" b="1" dirty="0" smtClean="0">
+              <a:rPr lang="en-US" altLang="ko-KR" b="1" dirty="0">
                 <a:latin typeface="맑은 고딕" panose="020B0503020000020004" pitchFamily="34" charset="-127"/>
                 <a:ea typeface="맑은 고딕" panose="020B0503020000020004" pitchFamily="34" charset="-127"/>
               </a:rPr>
               <a:t>/</a:t>
             </a:r>
             <a:r>
-              <a:rPr lang="ko-KR" altLang="en-US" b="1" dirty="0" smtClean="0">
+              <a:rPr lang="ko-KR" altLang="en-US" b="1" dirty="0">
                 <a:latin typeface="맑은 고딕" panose="020B0503020000020004" pitchFamily="34" charset="-127"/>
                 <a:ea typeface="맑은 고딕" panose="020B0503020000020004" pitchFamily="34" charset="-127"/>
               </a:rPr>
               <a:t>공고 하나 정하기</a:t>
             </a:r>
-            <a:endParaRPr lang="ko-KR" altLang="en-US" b="1" dirty="0">
-              <a:latin typeface="맑은 고딕" panose="020B0503020000020004" pitchFamily="34" charset="-127"/>
-              <a:ea typeface="맑은 고딕" panose="020B0503020000020004" pitchFamily="34" charset="-127"/>
-            </a:endParaRPr>
           </a:p>
         </p:txBody>
       </p:sp>
@@ -6636,27 +7466,27 @@
           <a:lstStyle/>
           <a:p>
             <a:r>
-              <a:rPr lang="ko-KR" altLang="en-US" sz="2800" spc="-150" dirty="0" smtClean="0">
+              <a:rPr lang="ko-KR" altLang="en-US" sz="2800" spc="-150" dirty="0">
                 <a:latin typeface="맑은 고딕" panose="020B0503020000020004" pitchFamily="34" charset="-127"/>
                 <a:ea typeface="맑은 고딕" panose="020B0503020000020004" pitchFamily="34" charset="-127"/>
               </a:rPr>
               <a:t>활동</a:t>
             </a:r>
             <a:r>
-              <a:rPr lang="en-US" altLang="ko-KR" sz="2800" spc="-150" dirty="0" smtClean="0">
+              <a:rPr lang="en-US" altLang="ko-KR" sz="2800" spc="-150" dirty="0">
                 <a:latin typeface="맑은 고딕" panose="020B0503020000020004" pitchFamily="34" charset="-127"/>
                 <a:ea typeface="맑은 고딕" panose="020B0503020000020004" pitchFamily="34" charset="-127"/>
               </a:rPr>
               <a:t>: </a:t>
             </a:r>
             <a:r>
-              <a:rPr lang="ko-KR" altLang="en-US" sz="2800" spc="-150" dirty="0" smtClean="0">
+              <a:rPr lang="ko-KR" altLang="en-US" sz="2800" spc="-150" dirty="0">
                 <a:latin typeface="맑은 고딕" panose="020B0503020000020004" pitchFamily="34" charset="-127"/>
                 <a:ea typeface="맑은 고딕" panose="020B0503020000020004" pitchFamily="34" charset="-127"/>
               </a:rPr>
               <a:t>본 과목에서 가상으로 지원서를 작성할 회사 정하기</a:t>
             </a:r>
-            <a:endParaRPr lang="en-US" altLang="ko-KR" sz="2800" spc="-150" dirty="0" smtClean="0">
+            <a:endParaRPr lang="en-US" altLang="ko-KR" sz="2800" spc="-150" dirty="0">
               <a:latin typeface="맑은 고딕" panose="020B0503020000020004" pitchFamily="34" charset="-127"/>
               <a:ea typeface="맑은 고딕" panose="020B0503020000020004" pitchFamily="34" charset="-127"/>
             </a:endParaRPr>
@@ -6664,16 +7494,12 @@
           <a:p>
             <a:pPr lvl="1"/>
             <a:r>
-              <a:rPr lang="ko-KR" altLang="en-US" sz="2400" spc="-150" dirty="0" smtClean="0">
+              <a:rPr lang="ko-KR" altLang="en-US" sz="2400" spc="-150" dirty="0">
                 <a:latin typeface="맑은 고딕" panose="020B0503020000020004" pitchFamily="34" charset="-127"/>
                 <a:ea typeface="맑은 고딕" panose="020B0503020000020004" pitchFamily="34" charset="-127"/>
               </a:rPr>
               <a:t>해당 회사를 대상으로 자기소개서를 작성할 것임</a:t>
             </a:r>
-            <a:endParaRPr lang="ko-KR" altLang="en-US" sz="2400" spc="-150" dirty="0">
-              <a:latin typeface="맑은 고딕" panose="020B0503020000020004" pitchFamily="34" charset="-127"/>
-              <a:ea typeface="맑은 고딕" panose="020B0503020000020004" pitchFamily="34" charset="-127"/>
-            </a:endParaRPr>
           </a:p>
         </p:txBody>
       </p:sp>
@@ -6686,7 +7512,7 @@
           <p:nvPr>
             <p:extLst>
               <p:ext uri="{D42A27DB-BD31-4B8C-83A1-F6EECF244321}">
-                <p14:modId xmlns:p14="http://schemas.microsoft.com/office/powerpoint/2010/main" val="1865091428"/>
+                <p14:modId xmlns:p14="http://schemas.microsoft.com/office/powerpoint/2010/main" val="3899626090"/>
               </p:ext>
             </p:extLst>
           </p:nvPr>
@@ -6792,28 +7618,28 @@
                     <a:lstStyle/>
                     <a:p>
                       <a:r>
-                        <a:rPr lang="ko-KR" altLang="en-US" sz="1800" dirty="0" err="1" smtClean="0">
+                        <a:rPr lang="ko-KR" altLang="en-US" sz="1800" dirty="0" err="1">
                           <a:latin typeface="맑은 고딕" panose="020B0503020000020004" pitchFamily="34" charset="-127"/>
                           <a:ea typeface="맑은 고딕" panose="020B0503020000020004" pitchFamily="34" charset="-127"/>
                         </a:rPr>
                         <a:t>공고명</a:t>
                       </a:r>
                       <a:r>
-                        <a:rPr lang="en-US" altLang="ko-KR" sz="1800" dirty="0" smtClean="0">
+                        <a:rPr lang="en-US" altLang="ko-KR" sz="1800" dirty="0">
                           <a:latin typeface="맑은 고딕" panose="020B0503020000020004" pitchFamily="34" charset="-127"/>
                           <a:ea typeface="맑은 고딕" panose="020B0503020000020004" pitchFamily="34" charset="-127"/>
                         </a:rPr>
                         <a:t>(</a:t>
                       </a:r>
                       <a:r>
-                        <a:rPr lang="ko-KR" altLang="en-US" sz="1800" dirty="0" err="1" smtClean="0">
+                        <a:rPr lang="ko-KR" altLang="en-US" sz="1800" dirty="0" err="1">
                           <a:latin typeface="맑은 고딕" panose="020B0503020000020004" pitchFamily="34" charset="-127"/>
                           <a:ea typeface="맑은 고딕" panose="020B0503020000020004" pitchFamily="34" charset="-127"/>
                         </a:rPr>
                         <a:t>링크첨부</a:t>
                       </a:r>
                       <a:r>
-                        <a:rPr lang="en-US" altLang="ko-KR" sz="1800" dirty="0" smtClean="0">
+                        <a:rPr lang="en-US" altLang="ko-KR" sz="1800" dirty="0">
                           <a:latin typeface="맑은 고딕" panose="020B0503020000020004" pitchFamily="34" charset="-127"/>
                           <a:ea typeface="맑은 고딕" panose="020B0503020000020004" pitchFamily="34" charset="-127"/>
                         </a:rPr>
@@ -6893,6 +7719,34 @@
                     <a:bodyPr/>
                     <a:lstStyle/>
                     <a:p>
+                      <a:r>
+                        <a:rPr lang="en-US" altLang="ko-KR" sz="1800" dirty="0">
+                          <a:latin typeface="맑은 고딕" panose="020B0503020000020004" pitchFamily="34" charset="-127"/>
+                          <a:ea typeface="맑은 고딕" panose="020B0503020000020004" pitchFamily="34" charset="-127"/>
+                        </a:rPr>
+                        <a:t>(</a:t>
+                      </a:r>
+                      <a:r>
+                        <a:rPr lang="ko-KR" altLang="en-US" sz="1800" dirty="0">
+                          <a:latin typeface="맑은 고딕" panose="020B0503020000020004" pitchFamily="34" charset="-127"/>
+                          <a:ea typeface="맑은 고딕" panose="020B0503020000020004" pitchFamily="34" charset="-127"/>
+                        </a:rPr>
+                        <a:t>주</a:t>
+                      </a:r>
+                      <a:r>
+                        <a:rPr lang="en-US" altLang="ko-KR" sz="1800" dirty="0">
+                          <a:latin typeface="맑은 고딕" panose="020B0503020000020004" pitchFamily="34" charset="-127"/>
+                          <a:ea typeface="맑은 고딕" panose="020B0503020000020004" pitchFamily="34" charset="-127"/>
+                        </a:rPr>
+                        <a:t>)</a:t>
+                      </a:r>
+                      <a:r>
+                        <a:rPr lang="ko-KR" altLang="en-US" sz="1800" dirty="0" err="1">
+                          <a:latin typeface="맑은 고딕" panose="020B0503020000020004" pitchFamily="34" charset="-127"/>
+                          <a:ea typeface="맑은 고딕" panose="020B0503020000020004" pitchFamily="34" charset="-127"/>
+                        </a:rPr>
+                        <a:t>쎄믹스</a:t>
+                      </a:r>
                       <a:endParaRPr lang="ko-KR" altLang="en-US" sz="1800" dirty="0">
                         <a:latin typeface="맑은 고딕" panose="020B0503020000020004" pitchFamily="34" charset="-127"/>
                         <a:ea typeface="맑은 고딕" panose="020B0503020000020004" pitchFamily="34" charset="-127"/>
@@ -6955,6 +7809,35 @@
                     <a:bodyPr/>
                     <a:lstStyle/>
                     <a:p>
+                      <a:r>
+                        <a:rPr lang="ko-KR" altLang="en-US" sz="1800" dirty="0" err="1">
+                          <a:latin typeface="맑은 고딕" panose="020B0503020000020004" pitchFamily="34" charset="-127"/>
+                          <a:ea typeface="맑은 고딕" panose="020B0503020000020004" pitchFamily="34" charset="-127"/>
+                          <a:hlinkClick r:id="rId2"/>
+                        </a:rPr>
+                        <a:t>쎄믹스</a:t>
+                      </a:r>
+                      <a:r>
+                        <a:rPr lang="en-US" altLang="ko-KR" sz="1800" dirty="0">
+                          <a:latin typeface="맑은 고딕" panose="020B0503020000020004" pitchFamily="34" charset="-127"/>
+                          <a:ea typeface="맑은 고딕" panose="020B0503020000020004" pitchFamily="34" charset="-127"/>
+                        </a:rPr>
+                        <a:t>(</a:t>
+                      </a:r>
+                      <a:r>
+                        <a:rPr lang="ko-KR" altLang="en-US" sz="1800" dirty="0">
+                          <a:latin typeface="맑은 고딕" panose="020B0503020000020004" pitchFamily="34" charset="-127"/>
+                          <a:ea typeface="맑은 고딕" panose="020B0503020000020004" pitchFamily="34" charset="-127"/>
+                        </a:rPr>
+                        <a:t>컨트롤 씨 누르고 선택</a:t>
+                      </a:r>
+                      <a:r>
+                        <a:rPr lang="en-US" altLang="ko-KR" sz="1800" dirty="0">
+                          <a:latin typeface="맑은 고딕" panose="020B0503020000020004" pitchFamily="34" charset="-127"/>
+                          <a:ea typeface="맑은 고딕" panose="020B0503020000020004" pitchFamily="34" charset="-127"/>
+                        </a:rPr>
+                        <a:t>)</a:t>
+                      </a:r>
                       <a:endParaRPr lang="ko-KR" altLang="en-US" sz="1800" dirty="0">
                         <a:latin typeface="맑은 고딕" panose="020B0503020000020004" pitchFamily="34" charset="-127"/>
                         <a:ea typeface="맑은 고딕" panose="020B0503020000020004" pitchFamily="34" charset="-127"/>
